--- a/presentations/PR_L09_Subprograms_Lesson.pptx
+++ b/presentations/PR_L09_Subprograms_Lesson.pptx
@@ -2167,7 +2167,7 @@
                 <a:ea typeface="IBM Plex Sans" pitchFamily="34" charset="-122"/>
                 <a:cs typeface="IBM Plex Sans" pitchFamily="34" charset="-120"/>
               </a:rPr>
-              <a:t>Long programs are built out of small named parts. On the assembly line you will write procedures and functions, pass values into them and get answers back out.</a:t>
+              <a:t>Long programs are built out of small named parts, each one written once and called whenever it is wanted. Work through the six stations and you will write procedures and functions, pass values into them with parameters and get answers back out with return.</a:t>
             </a:r>
             <a:endParaRPr lang="en-US" sz="1800" dirty="0"/>
           </a:p>
@@ -2725,7 +2725,7 @@
                 <a:ea typeface="IBM Plex Sans" pitchFamily="34" charset="-122"/>
                 <a:cs typeface="IBM Plex Sans" pitchFamily="34" charset="-120"/>
               </a:rPr>
-              <a:t>Plan which parts of a booking receipt program should become subprograms.</a:t>
+              <a:t>Which parts of a long program are worth turning into subprograms, and which must return a value?</a:t>
             </a:r>
             <a:endParaRPr lang="en-US" sz="1600" dirty="0"/>
           </a:p>
@@ -2805,7 +2805,7 @@
                 <a:ea typeface="IBM Plex Sans" pitchFamily="34" charset="-122"/>
                 <a:cs typeface="IBM Plex Sans" pitchFamily="34" charset="-120"/>
               </a:rPr>
-              <a:t>Breaking a problem into named parts is decomposition, which you met in topic 2.1.</a:t>
+              <a:t>Breaking a problem down into small named parts has a name you met in topic 2.1:...</a:t>
             </a:r>
             <a:endParaRPr lang="en-US" sz="1600" dirty="0"/>
           </a:p>
@@ -3104,7 +3104,7 @@
                 <a:ea typeface="IBM Plex Sans" pitchFamily="34" charset="-122"/>
                 <a:cs typeface="IBM Plex Sans" pitchFamily="34" charset="-120"/>
               </a:rPr>
-              <a:t>Eight subprograms have come off the line. Tap the star and decide whether each one is a function or a procedure.</a:t>
+              <a:t>Eight subprograms are described on the floor below you. Tap the star and decide whether each one is a function or a procedure.</a:t>
             </a:r>
             <a:endParaRPr lang="en-US" sz="2200" dirty="0"/>
           </a:p>
@@ -3567,7 +3567,7 @@
                 <a:ea typeface="IBM Plex Sans" pitchFamily="34" charset="-122"/>
                 <a:cs typeface="IBM Plex Sans" pitchFamily="34" charset="-120"/>
               </a:rPr>
-              <a:t>A parameter can be given a default, so label("Juice") still works when the price is usually the same.</a:t>
+              <a:t>A parameter can be given a default value in the definition, so the subprogram still runs when the caller leaves that argument out. The default is used only when no value is handed over.</a:t>
             </a:r>
             <a:endParaRPr lang="en-US" sz="1300" dirty="0"/>
           </a:p>
@@ -4060,7 +4060,7 @@
                 <a:ea typeface="IBM Plex Sans" pitchFamily="34" charset="-122"/>
                 <a:cs typeface="IBM Plex Sans" pitchFamily="34" charset="-120"/>
               </a:rPr>
-              <a:t>A subprogram called vat takes an amount and its last line is print(amount * 0.2). The main program writes tax = vat(50) and then prints tax, which shows None. Explain why, and write the change needed inside the subprogram.</a:t>
+              <a:t>A function called double holds one line, print(n * 2). The main program writes answer = double(7) and then prints answer, which shows None. Explain why None is printed, and write the line inside double corrected.</a:t>
             </a:r>
             <a:endParaRPr lang="en-US" sz="1700" dirty="0"/>
           </a:p>
@@ -4190,7 +4190,7 @@
                 <a:ea typeface="IBM Plex Sans" pitchFamily="34" charset="-122"/>
                 <a:cs typeface="IBM Plex Sans" pitchFamily="34" charset="-120"/>
               </a:rPr>
-              <a:t>Write a function that takes a length and a width in metres and returns the area, and a main program that uses it to print the area of two different rooms.</a:t>
+              <a:t>Write a function that takes two whole numbers and returns the larger of them, and a main program that reads two numbers and prints the value the function hands back.</a:t>
             </a:r>
             <a:endParaRPr lang="en-US" sz="1700" dirty="0"/>
           </a:p>
@@ -4320,7 +4320,7 @@
                 <a:ea typeface="IBM Plex Sans" pitchFamily="34" charset="-122"/>
                 <a:cs typeface="IBM Plex Sans" pitchFamily="34" charset="-120"/>
               </a:rPr>
-              <a:t>Write a procedure that takes a pupil's name and a score and prints one tidy line of a results table, then call it for three different pupils.</a:t>
+              <a:t>Write a procedure that takes a word and a whole number and prints them on one line with a single space between them, then call it for three different pairs of values.</a:t>
             </a:r>
             <a:endParaRPr lang="en-US" sz="1700" dirty="0"/>
           </a:p>
@@ -5824,7 +5824,7 @@
                 <a:ea typeface="IBM Plex Sans" pitchFamily="34" charset="-122"/>
                 <a:cs typeface="IBM Plex Sans" pitchFamily="34" charset="-120"/>
               </a:rPr>
-              <a:t>Understand how a parameter passes a value into a subprogram and how return passes one back out</a:t>
+              <a:t>Understand how a parameter carries a value into a subprogram and how return carries one back out</a:t>
             </a:r>
             <a:endParaRPr lang="en-US" sz="1900" dirty="0"/>
           </a:p>
@@ -5922,7 +5922,7 @@
                 <a:ea typeface="IBM Plex Sans" pitchFamily="34" charset="-122"/>
                 <a:cs typeface="IBM Plex Sans" pitchFamily="34" charset="-120"/>
               </a:rPr>
-              <a:t>Know the difference between a local variable and a global one</a:t>
+              <a:t>Know how to write a subprogram that uses a variable of its own, and one that changes a shared variable</a:t>
             </a:r>
             <a:endParaRPr lang="en-US" sz="1900" dirty="0"/>
           </a:p>
@@ -8027,7 +8027,7 @@
                 <a:ea typeface="IBM Plex Sans" pitchFamily="34" charset="-122"/>
                 <a:cs typeface="IBM Plex Sans" pitchFamily="34" charset="-120"/>
               </a:rPr>
-              <a:t>Writing a job once and calling it many times has a name of its own: code reuse.</a:t>
+              <a:t>Writing a job once and then calling it as often as you like is known as...</a:t>
             </a:r>
             <a:endParaRPr lang="en-US" sz="1600" dirty="0"/>
           </a:p>
@@ -8603,7 +8603,7 @@
                 <a:ea typeface="IBM Plex Sans" pitchFamily="34" charset="-122"/>
                 <a:cs typeface="IBM Plex Sans" pitchFamily="34" charset="-120"/>
               </a:rPr>
-              <a:t>The names in the definition are the parameters; the values handed over when it is called are the arguments.</a:t>
+              <a:t>The names in the brackets of the definition are the parameters, and the values handed over at the call are the...</a:t>
             </a:r>
             <a:endParaRPr lang="en-US" sz="1600" dirty="0"/>
           </a:p>
@@ -9179,7 +9179,7 @@
                 <a:ea typeface="IBM Plex Sans" pitchFamily="34" charset="-122"/>
                 <a:cs typeface="IBM Plex Sans" pitchFamily="34" charset="-120"/>
               </a:rPr>
-              <a:t>return ends the subprogram there and then, so any line written after it never runs.</a:t>
+              <a:t>return hands the value back and ends the subprogram on the spot, so a line written after it...</a:t>
             </a:r>
             <a:endParaRPr lang="en-US" sz="1600" dirty="0"/>
           </a:p>
@@ -9755,7 +9755,7 @@
                 <a:ea typeface="IBM Plex Sans" pitchFamily="34" charset="-122"/>
                 <a:cs typeface="IBM Plex Sans" pitchFamily="34" charset="-120"/>
               </a:rPr>
-              <a:t>The exam marks this difference, so say 'function' only when a value actually comes back.</a:t>
+              <a:t>The one thing that makes a subprogram a function rather than a procedure is that it...</a:t>
             </a:r>
             <a:endParaRPr lang="en-US" sz="1600" dirty="0"/>
           </a:p>
@@ -10331,7 +10331,7 @@
                 <a:ea typeface="IBM Plex Sans" pitchFamily="34" charset="-122"/>
                 <a:cs typeface="IBM Plex Sans" pitchFamily="34" charset="-120"/>
               </a:rPr>
-              <a:t>Keeping variables local is good practice: it stops one part of a program quietly breaking another.</a:t>
+              <a:t>Keeping a variable local stops one part of a program quietly breaking...</a:t>
             </a:r>
             <a:endParaRPr lang="en-US" sz="1600" dirty="0"/>
           </a:p>

--- a/presentations/PR_L09_Subprograms_Lesson.pptx
+++ b/presentations/PR_L09_Subprograms_Lesson.pptx
@@ -4060,7 +4060,449 @@
                 <a:ea typeface="IBM Plex Sans" pitchFamily="34" charset="-122"/>
                 <a:cs typeface="IBM Plex Sans" pitchFamily="34" charset="-120"/>
               </a:rPr>
-              <a:t>A function called double holds one line, print(n * 2). The main program writes answer = double(7) and then prints answer, which shows None. Explain why None is printed, and write the line inside double corrected.</a:t>
+              <a:t>A function called </a:t>
+            </a:r>
+            <a:pPr indent="0" marL="0">
+              <a:lnSpc>
+                <a:spcPct val="118000"/>
+              </a:lnSpc>
+              <a:buNone/>
+            </a:pPr>
+            <a:r>
+              <a:rPr lang="en-US" sz="1700" dirty="0">
+                <a:solidFill>
+                  <a:srgbClr val="18181B"/>
+                </a:solidFill>
+                <a:latin typeface="IBM Plex Mono" pitchFamily="34" charset="0"/>
+                <a:ea typeface="IBM Plex Mono" pitchFamily="34" charset="-122"/>
+                <a:cs typeface="IBM Plex Mono" pitchFamily="34" charset="-120"/>
+              </a:rPr>
+              <a:t>double</a:t>
+            </a:r>
+            <a:pPr indent="0" marL="0">
+              <a:lnSpc>
+                <a:spcPct val="118000"/>
+              </a:lnSpc>
+              <a:buNone/>
+            </a:pPr>
+            <a:r>
+              <a:rPr lang="en-US" sz="1700" dirty="0">
+                <a:solidFill>
+                  <a:srgbClr val="101828"/>
+                </a:solidFill>
+                <a:latin typeface="IBM Plex Sans" pitchFamily="34" charset="0"/>
+                <a:ea typeface="IBM Plex Sans" pitchFamily="34" charset="-122"/>
+                <a:cs typeface="IBM Plex Sans" pitchFamily="34" charset="-120"/>
+              </a:rPr>
+              <a:t> holds one line, </a:t>
+            </a:r>
+            <a:pPr indent="0" marL="0">
+              <a:lnSpc>
+                <a:spcPct val="118000"/>
+              </a:lnSpc>
+              <a:buNone/>
+            </a:pPr>
+            <a:r>
+              <a:rPr lang="en-US" sz="1700" dirty="0">
+                <a:solidFill>
+                  <a:srgbClr val="1D4ED8"/>
+                </a:solidFill>
+                <a:latin typeface="IBM Plex Mono" pitchFamily="34" charset="0"/>
+                <a:ea typeface="IBM Plex Mono" pitchFamily="34" charset="-122"/>
+                <a:cs typeface="IBM Plex Mono" pitchFamily="34" charset="-120"/>
+              </a:rPr>
+              <a:t>print</a:t>
+            </a:r>
+            <a:pPr indent="0" marL="0">
+              <a:lnSpc>
+                <a:spcPct val="118000"/>
+              </a:lnSpc>
+              <a:buNone/>
+            </a:pPr>
+            <a:r>
+              <a:rPr lang="en-US" sz="1700" dirty="0">
+                <a:solidFill>
+                  <a:srgbClr val="3F3F46"/>
+                </a:solidFill>
+                <a:latin typeface="IBM Plex Mono" pitchFamily="34" charset="0"/>
+                <a:ea typeface="IBM Plex Mono" pitchFamily="34" charset="-122"/>
+                <a:cs typeface="IBM Plex Mono" pitchFamily="34" charset="-120"/>
+              </a:rPr>
+              <a:t>(</a:t>
+            </a:r>
+            <a:pPr indent="0" marL="0">
+              <a:lnSpc>
+                <a:spcPct val="118000"/>
+              </a:lnSpc>
+              <a:buNone/>
+            </a:pPr>
+            <a:r>
+              <a:rPr lang="en-US" sz="1700" dirty="0">
+                <a:solidFill>
+                  <a:srgbClr val="18181B"/>
+                </a:solidFill>
+                <a:latin typeface="IBM Plex Mono" pitchFamily="34" charset="0"/>
+                <a:ea typeface="IBM Plex Mono" pitchFamily="34" charset="-122"/>
+                <a:cs typeface="IBM Plex Mono" pitchFamily="34" charset="-120"/>
+              </a:rPr>
+              <a:t>n</a:t>
+            </a:r>
+            <a:pPr indent="0" marL="0">
+              <a:lnSpc>
+                <a:spcPct val="118000"/>
+              </a:lnSpc>
+              <a:buNone/>
+            </a:pPr>
+            <a:r>
+              <a:rPr lang="en-US" sz="1700" dirty="0">
+                <a:solidFill>
+                  <a:srgbClr val="18181B"/>
+                </a:solidFill>
+                <a:latin typeface="IBM Plex Mono" pitchFamily="34" charset="0"/>
+                <a:ea typeface="IBM Plex Mono" pitchFamily="34" charset="-122"/>
+                <a:cs typeface="IBM Plex Mono" pitchFamily="34" charset="-120"/>
+              </a:rPr>
+              <a:t> </a:t>
+            </a:r>
+            <a:pPr indent="0" marL="0">
+              <a:lnSpc>
+                <a:spcPct val="118000"/>
+              </a:lnSpc>
+              <a:buNone/>
+            </a:pPr>
+            <a:r>
+              <a:rPr lang="en-US" sz="1700" dirty="0">
+                <a:solidFill>
+                  <a:srgbClr val="3F3F46"/>
+                </a:solidFill>
+                <a:latin typeface="IBM Plex Mono" pitchFamily="34" charset="0"/>
+                <a:ea typeface="IBM Plex Mono" pitchFamily="34" charset="-122"/>
+                <a:cs typeface="IBM Plex Mono" pitchFamily="34" charset="-120"/>
+              </a:rPr>
+              <a:t>*</a:t>
+            </a:r>
+            <a:pPr indent="0" marL="0">
+              <a:lnSpc>
+                <a:spcPct val="118000"/>
+              </a:lnSpc>
+              <a:buNone/>
+            </a:pPr>
+            <a:r>
+              <a:rPr lang="en-US" sz="1700" dirty="0">
+                <a:solidFill>
+                  <a:srgbClr val="18181B"/>
+                </a:solidFill>
+                <a:latin typeface="IBM Plex Mono" pitchFamily="34" charset="0"/>
+                <a:ea typeface="IBM Plex Mono" pitchFamily="34" charset="-122"/>
+                <a:cs typeface="IBM Plex Mono" pitchFamily="34" charset="-120"/>
+              </a:rPr>
+              <a:t> </a:t>
+            </a:r>
+            <a:pPr indent="0" marL="0">
+              <a:lnSpc>
+                <a:spcPct val="118000"/>
+              </a:lnSpc>
+              <a:buNone/>
+            </a:pPr>
+            <a:r>
+              <a:rPr lang="en-US" sz="1700" dirty="0">
+                <a:solidFill>
+                  <a:srgbClr val="9A3412"/>
+                </a:solidFill>
+                <a:latin typeface="IBM Plex Mono" pitchFamily="34" charset="0"/>
+                <a:ea typeface="IBM Plex Mono" pitchFamily="34" charset="-122"/>
+                <a:cs typeface="IBM Plex Mono" pitchFamily="34" charset="-120"/>
+              </a:rPr>
+              <a:t>2</a:t>
+            </a:r>
+            <a:pPr indent="0" marL="0">
+              <a:lnSpc>
+                <a:spcPct val="118000"/>
+              </a:lnSpc>
+              <a:buNone/>
+            </a:pPr>
+            <a:r>
+              <a:rPr lang="en-US" sz="1700" dirty="0">
+                <a:solidFill>
+                  <a:srgbClr val="3F3F46"/>
+                </a:solidFill>
+                <a:latin typeface="IBM Plex Mono" pitchFamily="34" charset="0"/>
+                <a:ea typeface="IBM Plex Mono" pitchFamily="34" charset="-122"/>
+                <a:cs typeface="IBM Plex Mono" pitchFamily="34" charset="-120"/>
+              </a:rPr>
+              <a:t>)</a:t>
+            </a:r>
+            <a:pPr indent="0" marL="0">
+              <a:lnSpc>
+                <a:spcPct val="118000"/>
+              </a:lnSpc>
+              <a:buNone/>
+            </a:pPr>
+            <a:r>
+              <a:rPr lang="en-US" sz="1700" dirty="0">
+                <a:solidFill>
+                  <a:srgbClr val="101828"/>
+                </a:solidFill>
+                <a:latin typeface="IBM Plex Sans" pitchFamily="34" charset="0"/>
+                <a:ea typeface="IBM Plex Sans" pitchFamily="34" charset="-122"/>
+                <a:cs typeface="IBM Plex Sans" pitchFamily="34" charset="-120"/>
+              </a:rPr>
+              <a:t>. The main program writes </a:t>
+            </a:r>
+            <a:pPr indent="0" marL="0">
+              <a:lnSpc>
+                <a:spcPct val="118000"/>
+              </a:lnSpc>
+              <a:buNone/>
+            </a:pPr>
+            <a:r>
+              <a:rPr lang="en-US" sz="1700" dirty="0">
+                <a:solidFill>
+                  <a:srgbClr val="18181B"/>
+                </a:solidFill>
+                <a:latin typeface="IBM Plex Mono" pitchFamily="34" charset="0"/>
+                <a:ea typeface="IBM Plex Mono" pitchFamily="34" charset="-122"/>
+                <a:cs typeface="IBM Plex Mono" pitchFamily="34" charset="-120"/>
+              </a:rPr>
+              <a:t>answer</a:t>
+            </a:r>
+            <a:pPr indent="0" marL="0">
+              <a:lnSpc>
+                <a:spcPct val="118000"/>
+              </a:lnSpc>
+              <a:buNone/>
+            </a:pPr>
+            <a:r>
+              <a:rPr lang="en-US" sz="1700" dirty="0">
+                <a:solidFill>
+                  <a:srgbClr val="18181B"/>
+                </a:solidFill>
+                <a:latin typeface="IBM Plex Mono" pitchFamily="34" charset="0"/>
+                <a:ea typeface="IBM Plex Mono" pitchFamily="34" charset="-122"/>
+                <a:cs typeface="IBM Plex Mono" pitchFamily="34" charset="-120"/>
+              </a:rPr>
+              <a:t> </a:t>
+            </a:r>
+            <a:pPr indent="0" marL="0">
+              <a:lnSpc>
+                <a:spcPct val="118000"/>
+              </a:lnSpc>
+              <a:buNone/>
+            </a:pPr>
+            <a:r>
+              <a:rPr lang="en-US" sz="1700" dirty="0">
+                <a:solidFill>
+                  <a:srgbClr val="3F3F46"/>
+                </a:solidFill>
+                <a:latin typeface="IBM Plex Mono" pitchFamily="34" charset="0"/>
+                <a:ea typeface="IBM Plex Mono" pitchFamily="34" charset="-122"/>
+                <a:cs typeface="IBM Plex Mono" pitchFamily="34" charset="-120"/>
+              </a:rPr>
+              <a:t>=</a:t>
+            </a:r>
+            <a:pPr indent="0" marL="0">
+              <a:lnSpc>
+                <a:spcPct val="118000"/>
+              </a:lnSpc>
+              <a:buNone/>
+            </a:pPr>
+            <a:r>
+              <a:rPr lang="en-US" sz="1700" dirty="0">
+                <a:solidFill>
+                  <a:srgbClr val="18181B"/>
+                </a:solidFill>
+                <a:latin typeface="IBM Plex Mono" pitchFamily="34" charset="0"/>
+                <a:ea typeface="IBM Plex Mono" pitchFamily="34" charset="-122"/>
+                <a:cs typeface="IBM Plex Mono" pitchFamily="34" charset="-120"/>
+              </a:rPr>
+              <a:t> </a:t>
+            </a:r>
+            <a:pPr indent="0" marL="0">
+              <a:lnSpc>
+                <a:spcPct val="118000"/>
+              </a:lnSpc>
+              <a:buNone/>
+            </a:pPr>
+            <a:r>
+              <a:rPr lang="en-US" sz="1700" dirty="0">
+                <a:solidFill>
+                  <a:srgbClr val="18181B"/>
+                </a:solidFill>
+                <a:latin typeface="IBM Plex Mono" pitchFamily="34" charset="0"/>
+                <a:ea typeface="IBM Plex Mono" pitchFamily="34" charset="-122"/>
+                <a:cs typeface="IBM Plex Mono" pitchFamily="34" charset="-120"/>
+              </a:rPr>
+              <a:t>double</a:t>
+            </a:r>
+            <a:pPr indent="0" marL="0">
+              <a:lnSpc>
+                <a:spcPct val="118000"/>
+              </a:lnSpc>
+              <a:buNone/>
+            </a:pPr>
+            <a:r>
+              <a:rPr lang="en-US" sz="1700" dirty="0">
+                <a:solidFill>
+                  <a:srgbClr val="3F3F46"/>
+                </a:solidFill>
+                <a:latin typeface="IBM Plex Mono" pitchFamily="34" charset="0"/>
+                <a:ea typeface="IBM Plex Mono" pitchFamily="34" charset="-122"/>
+                <a:cs typeface="IBM Plex Mono" pitchFamily="34" charset="-120"/>
+              </a:rPr>
+              <a:t>(</a:t>
+            </a:r>
+            <a:pPr indent="0" marL="0">
+              <a:lnSpc>
+                <a:spcPct val="118000"/>
+              </a:lnSpc>
+              <a:buNone/>
+            </a:pPr>
+            <a:r>
+              <a:rPr lang="en-US" sz="1700" dirty="0">
+                <a:solidFill>
+                  <a:srgbClr val="9A3412"/>
+                </a:solidFill>
+                <a:latin typeface="IBM Plex Mono" pitchFamily="34" charset="0"/>
+                <a:ea typeface="IBM Plex Mono" pitchFamily="34" charset="-122"/>
+                <a:cs typeface="IBM Plex Mono" pitchFamily="34" charset="-120"/>
+              </a:rPr>
+              <a:t>7</a:t>
+            </a:r>
+            <a:pPr indent="0" marL="0">
+              <a:lnSpc>
+                <a:spcPct val="118000"/>
+              </a:lnSpc>
+              <a:buNone/>
+            </a:pPr>
+            <a:r>
+              <a:rPr lang="en-US" sz="1700" dirty="0">
+                <a:solidFill>
+                  <a:srgbClr val="3F3F46"/>
+                </a:solidFill>
+                <a:latin typeface="IBM Plex Mono" pitchFamily="34" charset="0"/>
+                <a:ea typeface="IBM Plex Mono" pitchFamily="34" charset="-122"/>
+                <a:cs typeface="IBM Plex Mono" pitchFamily="34" charset="-120"/>
+              </a:rPr>
+              <a:t>)</a:t>
+            </a:r>
+            <a:pPr indent="0" marL="0">
+              <a:lnSpc>
+                <a:spcPct val="118000"/>
+              </a:lnSpc>
+              <a:buNone/>
+            </a:pPr>
+            <a:r>
+              <a:rPr lang="en-US" sz="1700" dirty="0">
+                <a:solidFill>
+                  <a:srgbClr val="101828"/>
+                </a:solidFill>
+                <a:latin typeface="IBM Plex Sans" pitchFamily="34" charset="0"/>
+                <a:ea typeface="IBM Plex Sans" pitchFamily="34" charset="-122"/>
+                <a:cs typeface="IBM Plex Sans" pitchFamily="34" charset="-120"/>
+              </a:rPr>
+              <a:t> and then prints </a:t>
+            </a:r>
+            <a:pPr indent="0" marL="0">
+              <a:lnSpc>
+                <a:spcPct val="118000"/>
+              </a:lnSpc>
+              <a:buNone/>
+            </a:pPr>
+            <a:r>
+              <a:rPr lang="en-US" sz="1700" dirty="0">
+                <a:solidFill>
+                  <a:srgbClr val="18181B"/>
+                </a:solidFill>
+                <a:latin typeface="IBM Plex Mono" pitchFamily="34" charset="0"/>
+                <a:ea typeface="IBM Plex Mono" pitchFamily="34" charset="-122"/>
+                <a:cs typeface="IBM Plex Mono" pitchFamily="34" charset="-120"/>
+              </a:rPr>
+              <a:t>answer</a:t>
+            </a:r>
+            <a:pPr indent="0" marL="0">
+              <a:lnSpc>
+                <a:spcPct val="118000"/>
+              </a:lnSpc>
+              <a:buNone/>
+            </a:pPr>
+            <a:r>
+              <a:rPr lang="en-US" sz="1700" dirty="0">
+                <a:solidFill>
+                  <a:srgbClr val="101828"/>
+                </a:solidFill>
+                <a:latin typeface="IBM Plex Sans" pitchFamily="34" charset="0"/>
+                <a:ea typeface="IBM Plex Sans" pitchFamily="34" charset="-122"/>
+                <a:cs typeface="IBM Plex Sans" pitchFamily="34" charset="-120"/>
+              </a:rPr>
+              <a:t>, which shows </a:t>
+            </a:r>
+            <a:pPr indent="0" marL="0">
+              <a:lnSpc>
+                <a:spcPct val="118000"/>
+              </a:lnSpc>
+              <a:buNone/>
+            </a:pPr>
+            <a:r>
+              <a:rPr lang="en-US" sz="1700" dirty="0">
+                <a:solidFill>
+                  <a:srgbClr val="6B21A8"/>
+                </a:solidFill>
+                <a:latin typeface="IBM Plex Mono" pitchFamily="34" charset="0"/>
+                <a:ea typeface="IBM Plex Mono" pitchFamily="34" charset="-122"/>
+                <a:cs typeface="IBM Plex Mono" pitchFamily="34" charset="-120"/>
+              </a:rPr>
+              <a:t>None</a:t>
+            </a:r>
+            <a:pPr indent="0" marL="0">
+              <a:lnSpc>
+                <a:spcPct val="118000"/>
+              </a:lnSpc>
+              <a:buNone/>
+            </a:pPr>
+            <a:r>
+              <a:rPr lang="en-US" sz="1700" dirty="0">
+                <a:solidFill>
+                  <a:srgbClr val="101828"/>
+                </a:solidFill>
+                <a:latin typeface="IBM Plex Sans" pitchFamily="34" charset="0"/>
+                <a:ea typeface="IBM Plex Sans" pitchFamily="34" charset="-122"/>
+                <a:cs typeface="IBM Plex Sans" pitchFamily="34" charset="-120"/>
+              </a:rPr>
+              <a:t>. Explain why </a:t>
+            </a:r>
+            <a:pPr indent="0" marL="0">
+              <a:lnSpc>
+                <a:spcPct val="118000"/>
+              </a:lnSpc>
+              <a:buNone/>
+            </a:pPr>
+            <a:r>
+              <a:rPr lang="en-US" sz="1700" dirty="0">
+                <a:solidFill>
+                  <a:srgbClr val="6B21A8"/>
+                </a:solidFill>
+                <a:latin typeface="IBM Plex Mono" pitchFamily="34" charset="0"/>
+                <a:ea typeface="IBM Plex Mono" pitchFamily="34" charset="-122"/>
+                <a:cs typeface="IBM Plex Mono" pitchFamily="34" charset="-120"/>
+              </a:rPr>
+              <a:t>None</a:t>
+            </a:r>
+            <a:pPr indent="0" marL="0">
+              <a:lnSpc>
+                <a:spcPct val="118000"/>
+              </a:lnSpc>
+              <a:buNone/>
+            </a:pPr>
+            <a:r>
+              <a:rPr lang="en-US" sz="1700" dirty="0">
+                <a:solidFill>
+                  <a:srgbClr val="101828"/>
+                </a:solidFill>
+                <a:latin typeface="IBM Plex Sans" pitchFamily="34" charset="0"/>
+                <a:ea typeface="IBM Plex Sans" pitchFamily="34" charset="-122"/>
+                <a:cs typeface="IBM Plex Sans" pitchFamily="34" charset="-120"/>
+              </a:rPr>
+              <a:t> is printed, and write the line inside double corrected.</a:t>
             </a:r>
             <a:endParaRPr lang="en-US" sz="1700" dirty="0"/>
           </a:p>

--- a/presentations/PR_L09_Subprograms_Lesson.pptx
+++ b/presentations/PR_L09_Subprograms_Lesson.pptx
@@ -19,9 +19,10 @@
     <p:sldId id="267" r:id="rId13"/>
     <p:sldId id="268" r:id="rId14"/>
     <p:sldId id="269" r:id="rId15"/>
+    <p:sldId id="270" r:id="rId16"/>
   </p:sldIdLst>
   <p:notesMasterIdLst>
-    <p:notesMasterId r:id="rId16"/>
+    <p:notesMasterId r:id="rId17"/>
   </p:notesMasterIdLst>
   <p:sldSz cx="12192000" cy="6858000"/>
   <p:notesSz cx="6858000" cy="12192000"/>
@@ -692,7 +693,14 @@
           <a:p>
             <a:r>
               <a:rPr lang="en-US" dirty="0"/>
-              <a:t>Make them commit to an answer on paper before they tap the star. Guessing first costs them the learning.</a:t>
+              <a:t>The answer is B: 5
+None.
+Do not say it yet. Every pupil commits first - fingers, whiteboards or a show of hands on each letter in turn - and you count the split before anyone can change their mind.
+IF MOST OF THE CLASS IS RIGHT: say why it is right in one sentence and go straight on to the independent work.
+IF A SIGNIFICANT GROUP IS ON ONE WRONG LETTER: that option is the misconception to teach against before anyone goes on. Go back to station 4, Functions and procedures, and work through its example again, aloud, with the class watching, then re-ask this question.
+The course's own response to a wrong answer here: The 5 on screen came from the print inside total. Nothing was handed back, so answer holds None. This is the mistake to watch for all lesson.
+A limitation, stated rather than papered over: one response covers every wrong option; it does not say what to revisit for each one. The course does not record what each separate wrong option means, and this slide does not invent it. Decide your own reteach for each option before the lesson; the options above are the start of it.
+This is a real activity from the experience (pr-l09-s4-c2), so the wording here is the wording a pupil will see.</a:t>
             </a:r>
             <a:endParaRPr lang="en-US" dirty="0"/>
           </a:p>
@@ -780,7 +788,7 @@
           <a:p>
             <a:r>
               <a:rPr lang="en-US" dirty="0"/>
-              <a:t>Use these as a settler, or as something for early finishers to read in the experience.</a:t>
+              <a:t>Make them commit to an answer on paper before they tap the star. Guessing first costs them the learning.</a:t>
             </a:r>
             <a:endParaRPr lang="en-US" dirty="0"/>
           </a:p>
@@ -868,7 +876,7 @@
           <a:p>
             <a:r>
               <a:rPr lang="en-US" dirty="0"/>
-              <a:t>Timed and silent. Mark against the answer sheet, then ask students to record their weakest area.</a:t>
+              <a:t>Use these as a settler, or as something for early finishers to read in the experience.</a:t>
             </a:r>
             <a:endParaRPr lang="en-US" dirty="0"/>
           </a:p>
@@ -956,7 +964,7 @@
           <a:p>
             <a:r>
               <a:rPr lang="en-US" dirty="0"/>
-              <a:t>Students copy their score-screen breakdown onto the worksheet, then rate themselves here.</a:t>
+              <a:t>Timed and silent. Mark against the answer sheet, then ask students to record their weakest area.</a:t>
             </a:r>
             <a:endParaRPr lang="en-US" dirty="0"/>
           </a:p>
@@ -980,6 +988,94 @@
             <a:fld id="{F7021451-1387-4CA6-816F-3879F97B5CBC}" type="slidenum">
               <a:rPr lang="en-US"/>
               <a:t>14</a:t>
+            </a:fld>
+            <a:endParaRPr lang="en-US"/>
+          </a:p>
+        </p:txBody>
+      </p:sp>
+    </p:spTree>
+    <p:extLst>
+      <p:ext uri="{BB962C8B-B14F-4D97-AF65-F5344CB8AC3E}">
+        <p14:creationId xmlns:p14="http://schemas.microsoft.com/office/powerpoint/2010/main" val="1024086991"/>
+      </p:ext>
+    </p:extLst>
+  </p:cSld>
+  <p:clrMapOvr>
+    <a:masterClrMapping/>
+  </p:clrMapOvr>
+</p:notes>
+</file>
+
+<file path=ppt/notesSlides/notesSlide15.xml><?xml version="1.0" encoding="utf-8"?>
+<p:notes xmlns:a="http://schemas.openxmlformats.org/drawingml/2006/main" xmlns:r="http://schemas.openxmlformats.org/officeDocument/2006/relationships" xmlns:p="http://schemas.openxmlformats.org/presentationml/2006/main">
+  <p:cSld>
+    <p:spTree>
+      <p:nvGrpSpPr>
+        <p:cNvPr id="1" name=""/>
+        <p:cNvGrpSpPr/>
+        <p:nvPr/>
+      </p:nvGrpSpPr>
+      <p:grpSpPr>
+        <a:xfrm>
+          <a:off x="0" y="0"/>
+          <a:ext cx="0" cy="0"/>
+          <a:chOff x="0" y="0"/>
+          <a:chExt cx="0" cy="0"/>
+        </a:xfrm>
+      </p:grpSpPr>
+      <p:sp>
+        <p:nvSpPr>
+          <p:cNvPr id="2" name="Slide Image Placeholder 1"/>
+          <p:cNvSpPr>
+            <a:spLocks noGrp="1" noRot="1" noChangeAspect="1"/>
+          </p:cNvSpPr>
+          <p:nvPr>
+            <p:ph type="sldImg"/>
+          </p:nvPr>
+        </p:nvSpPr>
+        <p:spPr/>
+      </p:sp>
+      <p:sp>
+        <p:nvSpPr>
+          <p:cNvPr id="3" name="Notes Placeholder 2"/>
+          <p:cNvSpPr>
+            <a:spLocks noGrp="1"/>
+          </p:cNvSpPr>
+          <p:nvPr>
+            <p:ph type="body" idx="1"/>
+          </p:nvPr>
+        </p:nvSpPr>
+        <p:spPr/>
+        <p:txBody>
+          <a:bodyPr/>
+          <a:lstStyle/>
+          <a:p>
+            <a:r>
+              <a:rPr lang="en-US" dirty="0"/>
+              <a:t>Students copy their score-screen breakdown onto the worksheet, then rate themselves here.</a:t>
+            </a:r>
+            <a:endParaRPr lang="en-US" dirty="0"/>
+          </a:p>
+        </p:txBody>
+      </p:sp>
+      <p:sp>
+        <p:nvSpPr>
+          <p:cNvPr id="4" name="Slide Number Placeholder 3"/>
+          <p:cNvSpPr>
+            <a:spLocks noGrp="1"/>
+          </p:cNvSpPr>
+          <p:nvPr>
+            <p:ph type="sldNum" sz="quarter" idx="10"/>
+          </p:nvPr>
+        </p:nvSpPr>
+        <p:spPr/>
+        <p:txBody>
+          <a:bodyPr/>
+          <a:lstStyle/>
+          <a:p>
+            <a:fld id="{F7021451-1387-4CA6-816F-3879F97B5CBC}" type="slidenum">
+              <a:rPr lang="en-US"/>
+              <a:t>15</a:t>
             </a:fld>
             <a:endParaRPr lang="en-US"/>
           </a:p>
@@ -2949,12 +3045,12 @@
         </p:nvSpPr>
         <p:spPr>
           <a:xfrm>
-            <a:off x="502920" y="438912"/>
-            <a:ext cx="3108960" cy="502920"/>
+            <a:off x="502920" y="457200"/>
+            <a:ext cx="1051560" cy="420624"/>
           </a:xfrm>
           <a:prstGeom prst="roundRect">
             <a:avLst>
-              <a:gd name="adj" fmla="val 18182"/>
+              <a:gd name="adj" fmla="val 21739"/>
             </a:avLst>
           </a:prstGeom>
           <a:solidFill>
@@ -2971,8 +3067,8 @@
         </p:nvSpPr>
         <p:spPr>
           <a:xfrm>
-            <a:off x="502920" y="438912"/>
-            <a:ext cx="3108960" cy="502920"/>
+            <a:off x="502920" y="457200"/>
+            <a:ext cx="1051560" cy="420624"/>
           </a:xfrm>
           <a:prstGeom prst="rect">
             <a:avLst/>
@@ -2988,7 +3084,7 @@
               <a:buNone/>
             </a:pPr>
             <a:r>
-              <a:rPr lang="en-US" sz="1300" b="1" dirty="0">
+              <a:rPr lang="en-US" sz="1200" b="1" dirty="0">
                 <a:solidFill>
                   <a:srgbClr val="101828"/>
                 </a:solidFill>
@@ -2996,9 +3092,9 @@
                 <a:ea typeface="IBM Plex Mono" pitchFamily="34" charset="-122"/>
                 <a:cs typeface="IBM Plex Mono" pitchFamily="34" charset="-120"/>
               </a:rPr>
-              <a:t>★  FINAL CHALLENGE</a:t>
-            </a:r>
-            <a:endParaRPr lang="en-US" sz="1300" dirty="0"/>
+              <a:t>CHECK</a:t>
+            </a:r>
+            <a:endParaRPr lang="en-US" sz="1200" dirty="0"/>
           </a:p>
         </p:txBody>
       </p:sp>
@@ -3010,51 +3106,93 @@
         </p:nvSpPr>
         <p:spPr>
           <a:xfrm>
-            <a:off x="502920" y="1097280"/>
-            <a:ext cx="11155680" cy="731520"/>
-          </a:xfrm>
-          <a:prstGeom prst="rect">
-            <a:avLst/>
-          </a:prstGeom>
-          <a:noFill/>
-          <a:ln/>
-        </p:spPr>
-        <p:txBody>
-          <a:bodyPr wrap="square" lIns="0" tIns="0" rIns="0" bIns="0" rtlCol="0" anchor="ctr"/>
-          <a:lstStyle/>
-          <a:p>
-            <a:pPr indent="0" marL="0">
-              <a:buNone/>
-            </a:pPr>
-            <a:r>
-              <a:rPr lang="en-US" sz="3400" b="1" dirty="0">
-                <a:solidFill>
-                  <a:srgbClr val="101828"/>
+            <a:off x="1737360" y="457200"/>
+            <a:ext cx="9875520" cy="420624"/>
+          </a:xfrm>
+          <a:prstGeom prst="rect">
+            <a:avLst/>
+          </a:prstGeom>
+          <a:noFill/>
+          <a:ln/>
+        </p:spPr>
+        <p:txBody>
+          <a:bodyPr wrap="square" lIns="0" tIns="0" rIns="0" bIns="0" rtlCol="0" anchor="ctr"/>
+          <a:lstStyle/>
+          <a:p>
+            <a:pPr indent="0" marL="0">
+              <a:buNone/>
+            </a:pPr>
+            <a:r>
+              <a:rPr lang="en-US" sz="1500" dirty="0">
+                <a:solidFill>
+                  <a:srgbClr val="667085"/>
                 </a:solidFill>
                 <a:latin typeface="IBM Plex Sans" pitchFamily="34" charset="0"/>
                 <a:ea typeface="IBM Plex Sans" pitchFamily="34" charset="-122"/>
                 <a:cs typeface="IBM Plex Sans" pitchFamily="34" charset="-120"/>
               </a:rPr>
-              <a:t>Function or procedure?</a:t>
-            </a:r>
-            <a:endParaRPr lang="en-US" sz="3400" dirty="0"/>
-          </a:p>
-        </p:txBody>
-      </p:sp>
-      <p:sp>
-        <p:nvSpPr>
-          <p:cNvPr id="8" name="Shape 6"/>
+              <a:t>Hands down. Everyone commits.</a:t>
+            </a:r>
+            <a:endParaRPr lang="en-US" sz="1500" dirty="0"/>
+          </a:p>
+        </p:txBody>
+      </p:sp>
+      <p:sp>
+        <p:nvSpPr>
+          <p:cNvPr id="8" name="Text 6"/>
+          <p:cNvSpPr txBox="1"/>
+          <p:nvPr/>
+        </p:nvSpPr>
+        <p:spPr>
+          <a:xfrm>
+            <a:off x="502920" y="1097280"/>
+            <a:ext cx="11155680" cy="914400"/>
+          </a:xfrm>
+          <a:prstGeom prst="rect">
+            <a:avLst/>
+          </a:prstGeom>
+          <a:noFill/>
+          <a:ln/>
+        </p:spPr>
+        <p:txBody>
+          <a:bodyPr wrap="square" lIns="0" tIns="0" rIns="0" bIns="0" rtlCol="0" anchor="ctr"/>
+          <a:lstStyle/>
+          <a:p>
+            <a:pPr indent="0" marL="0">
+              <a:lnSpc>
+                <a:spcPct val="115000"/>
+              </a:lnSpc>
+              <a:buNone/>
+            </a:pPr>
+            <a:r>
+              <a:rPr lang="en-US" sz="2600" b="1" dirty="0">
+                <a:solidFill>
+                  <a:srgbClr val="101828"/>
+                </a:solidFill>
+                <a:latin typeface="IBM Plex Sans" pitchFamily="34" charset="0"/>
+                <a:ea typeface="IBM Plex Sans" pitchFamily="34" charset="-122"/>
+                <a:cs typeface="IBM Plex Sans" pitchFamily="34" charset="-120"/>
+              </a:rPr>
+              <a:t>What will this program display?</a:t>
+            </a:r>
+            <a:endParaRPr lang="en-US" sz="2600" dirty="0"/>
+          </a:p>
+        </p:txBody>
+      </p:sp>
+      <p:sp>
+        <p:nvSpPr>
+          <p:cNvPr id="9" name="Shape 7"/>
           <p:cNvSpPr/>
           <p:nvPr/>
         </p:nvSpPr>
         <p:spPr>
           <a:xfrm>
-            <a:off x="502920" y="2011680"/>
-            <a:ext cx="11155680" cy="2194560"/>
+            <a:off x="502920" y="2148840"/>
+            <a:ext cx="5029200" cy="1554480"/>
           </a:xfrm>
           <a:prstGeom prst="roundRect">
             <a:avLst>
-              <a:gd name="adj" fmla="val 5000"/>
+              <a:gd name="adj" fmla="val 7059"/>
             </a:avLst>
           </a:prstGeom>
           <a:solidFill>
@@ -3062,7 +3200,7 @@
           </a:solidFill>
           <a:ln w="15875">
             <a:solidFill>
-              <a:srgbClr val="2D63FF"/>
+              <a:srgbClr val="D9DEE7"/>
             </a:solidFill>
             <a:prstDash val="solid"/>
           </a:ln>
@@ -3070,33 +3208,223 @@
       </p:sp>
       <p:sp>
         <p:nvSpPr>
-          <p:cNvPr id="9" name="Text 7"/>
-          <p:cNvSpPr txBox="1"/>
-          <p:nvPr/>
-        </p:nvSpPr>
-        <p:spPr>
-          <a:xfrm>
-            <a:off x="1005840" y="2331720"/>
-            <a:ext cx="10149840" cy="1554480"/>
-          </a:xfrm>
-          <a:prstGeom prst="rect">
-            <a:avLst/>
-          </a:prstGeom>
-          <a:noFill/>
-          <a:ln/>
-        </p:spPr>
-        <p:txBody>
-          <a:bodyPr wrap="square" lIns="0" tIns="0" rIns="0" bIns="0" rtlCol="0" anchor="ctr"/>
+          <p:cNvPr id="10" name="Text 8"/>
+          <p:cNvSpPr txBox="1"/>
+          <p:nvPr/>
+        </p:nvSpPr>
+        <p:spPr>
+          <a:xfrm>
+            <a:off x="822960" y="2350008"/>
+            <a:ext cx="4480560" cy="1152144"/>
+          </a:xfrm>
+          <a:prstGeom prst="rect">
+            <a:avLst/>
+          </a:prstGeom>
+          <a:noFill/>
+          <a:ln/>
+        </p:spPr>
+        <p:txBody>
+          <a:bodyPr wrap="square" lIns="0" tIns="0" rIns="0" bIns="0" rtlCol="0" anchor="t"/>
           <a:lstStyle/>
           <a:p>
             <a:pPr indent="0" marL="0">
               <a:lnSpc>
-                <a:spcPct val="130000"/>
+                <a:spcPct val="125000"/>
               </a:lnSpc>
               <a:buNone/>
             </a:pPr>
             <a:r>
-              <a:rPr lang="en-US" sz="2200" dirty="0">
+              <a:rPr lang="en-US" sz="1500" dirty="0">
+                <a:solidFill>
+                  <a:srgbClr val="101828"/>
+                </a:solidFill>
+                <a:latin typeface="IBM Plex Mono" pitchFamily="34" charset="0"/>
+                <a:ea typeface="IBM Plex Mono" pitchFamily="34" charset="-122"/>
+                <a:cs typeface="IBM Plex Mono" pitchFamily="34" charset="-120"/>
+              </a:rPr>
+              <a:t>def total(a, b):</a:t>
+            </a:r>
+            <a:endParaRPr lang="en-US" sz="1500" dirty="0"/>
+          </a:p>
+          <a:p>
+            <a:pPr indent="0" marL="0">
+              <a:lnSpc>
+                <a:spcPct val="125000"/>
+              </a:lnSpc>
+              <a:buNone/>
+            </a:pPr>
+            <a:r>
+              <a:rPr lang="en-US" sz="1500" dirty="0">
+                <a:solidFill>
+                  <a:srgbClr val="101828"/>
+                </a:solidFill>
+                <a:latin typeface="IBM Plex Mono" pitchFamily="34" charset="0"/>
+                <a:ea typeface="IBM Plex Mono" pitchFamily="34" charset="-122"/>
+                <a:cs typeface="IBM Plex Mono" pitchFamily="34" charset="-120"/>
+              </a:rPr>
+              <a:t>    print(a + b)</a:t>
+            </a:r>
+            <a:endParaRPr lang="en-US" sz="1500" dirty="0"/>
+          </a:p>
+          <a:p>
+            <a:pPr indent="0" marL="0">
+              <a:lnSpc>
+                <a:spcPct val="125000"/>
+              </a:lnSpc>
+              <a:buNone/>
+            </a:pPr>
+            <a:r>
+              <a:rPr lang="en-US" sz="1500" dirty="0">
+                <a:solidFill>
+                  <a:srgbClr val="101828"/>
+                </a:solidFill>
+                <a:latin typeface="IBM Plex Mono" pitchFamily="34" charset="0"/>
+                <a:ea typeface="IBM Plex Mono" pitchFamily="34" charset="-122"/>
+                <a:cs typeface="IBM Plex Mono" pitchFamily="34" charset="-120"/>
+              </a:rPr>
+              <a:t>answer = total(2, 3)</a:t>
+            </a:r>
+            <a:endParaRPr lang="en-US" sz="1500" dirty="0"/>
+          </a:p>
+          <a:p>
+            <a:pPr indent="0" marL="0">
+              <a:lnSpc>
+                <a:spcPct val="125000"/>
+              </a:lnSpc>
+              <a:buNone/>
+            </a:pPr>
+            <a:r>
+              <a:rPr lang="en-US" sz="1500" dirty="0">
+                <a:solidFill>
+                  <a:srgbClr val="101828"/>
+                </a:solidFill>
+                <a:latin typeface="IBM Plex Mono" pitchFamily="34" charset="0"/>
+                <a:ea typeface="IBM Plex Mono" pitchFamily="34" charset="-122"/>
+                <a:cs typeface="IBM Plex Mono" pitchFamily="34" charset="-120"/>
+              </a:rPr>
+              <a:t>print(answer)</a:t>
+            </a:r>
+            <a:endParaRPr lang="en-US" sz="1500" dirty="0"/>
+          </a:p>
+        </p:txBody>
+      </p:sp>
+      <p:sp>
+        <p:nvSpPr>
+          <p:cNvPr id="11" name="Shape 9"/>
+          <p:cNvSpPr/>
+          <p:nvPr/>
+        </p:nvSpPr>
+        <p:spPr>
+          <a:xfrm>
+            <a:off x="5806440" y="2148840"/>
+            <a:ext cx="5852160" cy="731520"/>
+          </a:xfrm>
+          <a:prstGeom prst="roundRect">
+            <a:avLst>
+              <a:gd name="adj" fmla="val 15000"/>
+            </a:avLst>
+          </a:prstGeom>
+          <a:solidFill>
+            <a:srgbClr val="FFFFFF"/>
+          </a:solidFill>
+          <a:ln w="15875">
+            <a:solidFill>
+              <a:srgbClr val="D9DEE7"/>
+            </a:solidFill>
+            <a:prstDash val="solid"/>
+          </a:ln>
+        </p:spPr>
+      </p:sp>
+      <p:sp>
+        <p:nvSpPr>
+          <p:cNvPr id="12" name="Shape 10"/>
+          <p:cNvSpPr/>
+          <p:nvPr/>
+        </p:nvSpPr>
+        <p:spPr>
+          <a:xfrm>
+            <a:off x="6080760" y="2295144"/>
+            <a:ext cx="438912" cy="438912"/>
+          </a:xfrm>
+          <a:prstGeom prst="roundRect">
+            <a:avLst>
+              <a:gd name="adj" fmla="val 20833"/>
+            </a:avLst>
+          </a:prstGeom>
+          <a:solidFill>
+            <a:srgbClr val="EEF2FB"/>
+          </a:solidFill>
+          <a:ln/>
+        </p:spPr>
+      </p:sp>
+      <p:sp>
+        <p:nvSpPr>
+          <p:cNvPr id="13" name="Text 11"/>
+          <p:cNvSpPr txBox="1"/>
+          <p:nvPr/>
+        </p:nvSpPr>
+        <p:spPr>
+          <a:xfrm>
+            <a:off x="6080760" y="2295144"/>
+            <a:ext cx="438912" cy="438912"/>
+          </a:xfrm>
+          <a:prstGeom prst="rect">
+            <a:avLst/>
+          </a:prstGeom>
+          <a:noFill/>
+          <a:ln/>
+        </p:spPr>
+        <p:txBody>
+          <a:bodyPr wrap="square" lIns="0" tIns="0" rIns="0" bIns="0" rtlCol="0" anchor="ctr"/>
+          <a:lstStyle/>
+          <a:p>
+            <a:pPr algn="ctr" indent="0" marL="0">
+              <a:buNone/>
+            </a:pPr>
+            <a:r>
+              <a:rPr lang="en-US" sz="1300" b="1" dirty="0">
+                <a:solidFill>
+                  <a:srgbClr val="2D63FF"/>
+                </a:solidFill>
+                <a:latin typeface="IBM Plex Mono" pitchFamily="34" charset="0"/>
+                <a:ea typeface="IBM Plex Mono" pitchFamily="34" charset="-122"/>
+                <a:cs typeface="IBM Plex Mono" pitchFamily="34" charset="-120"/>
+              </a:rPr>
+              <a:t>A</a:t>
+            </a:r>
+            <a:endParaRPr lang="en-US" sz="1300" dirty="0"/>
+          </a:p>
+        </p:txBody>
+      </p:sp>
+      <p:sp>
+        <p:nvSpPr>
+          <p:cNvPr id="14" name="Text 12"/>
+          <p:cNvSpPr txBox="1"/>
+          <p:nvPr/>
+        </p:nvSpPr>
+        <p:spPr>
+          <a:xfrm>
+            <a:off x="6720840" y="2148840"/>
+            <a:ext cx="4754880" cy="731520"/>
+          </a:xfrm>
+          <a:prstGeom prst="rect">
+            <a:avLst/>
+          </a:prstGeom>
+          <a:noFill/>
+          <a:ln/>
+        </p:spPr>
+        <p:txBody>
+          <a:bodyPr wrap="square" lIns="0" tIns="0" rIns="0" bIns="0" rtlCol="0" anchor="ctr"/>
+          <a:lstStyle/>
+          <a:p>
+            <a:pPr indent="0" marL="0">
+              <a:lnSpc>
+                <a:spcPct val="115000"/>
+              </a:lnSpc>
+              <a:buNone/>
+            </a:pPr>
+            <a:r>
+              <a:rPr lang="en-US" sz="1700" dirty="0">
                 <a:solidFill>
                   <a:srgbClr val="101828"/>
                 </a:solidFill>
@@ -3104,48 +3432,329 @@
                 <a:ea typeface="IBM Plex Sans" pitchFamily="34" charset="-122"/>
                 <a:cs typeface="IBM Plex Sans" pitchFamily="34" charset="-120"/>
               </a:rPr>
-              <a:t>Eight subprograms are described on the floor below you. Tap the star and decide whether each one is a function or a procedure.</a:t>
-            </a:r>
-            <a:endParaRPr lang="en-US" sz="2200" dirty="0"/>
-          </a:p>
-        </p:txBody>
-      </p:sp>
-      <p:sp>
-        <p:nvSpPr>
-          <p:cNvPr id="10" name="Text 8"/>
-          <p:cNvSpPr txBox="1"/>
-          <p:nvPr/>
-        </p:nvSpPr>
-        <p:spPr>
-          <a:xfrm>
-            <a:off x="502920" y="4526280"/>
-            <a:ext cx="11155680" cy="457200"/>
-          </a:xfrm>
-          <a:prstGeom prst="rect">
-            <a:avLst/>
-          </a:prstGeom>
-          <a:noFill/>
-          <a:ln/>
-        </p:spPr>
-        <p:txBody>
-          <a:bodyPr wrap="square" lIns="0" tIns="0" rIns="0" bIns="0" rtlCol="0" anchor="ctr"/>
-          <a:lstStyle/>
-          <a:p>
-            <a:pPr indent="0" marL="0">
-              <a:buNone/>
-            </a:pPr>
-            <a:r>
-              <a:rPr lang="en-US" sz="1600" dirty="0">
-                <a:solidFill>
-                  <a:srgbClr val="667085"/>
+              <a:t>None</a:t>
+            </a:r>
+            <a:endParaRPr lang="en-US" sz="1700" dirty="0"/>
+          </a:p>
+          <a:p>
+            <a:pPr indent="0" marL="0">
+              <a:lnSpc>
+                <a:spcPct val="115000"/>
+              </a:lnSpc>
+              <a:buNone/>
+            </a:pPr>
+            <a:r>
+              <a:rPr lang="en-US" sz="1700" dirty="0">
+                <a:solidFill>
+                  <a:srgbClr val="101828"/>
                 </a:solidFill>
                 <a:latin typeface="IBM Plex Sans" pitchFamily="34" charset="0"/>
                 <a:ea typeface="IBM Plex Sans" pitchFamily="34" charset="-122"/>
                 <a:cs typeface="IBM Plex Sans" pitchFamily="34" charset="-120"/>
               </a:rPr>
-              <a:t>Predict on paper first, then look down and test it.</a:t>
-            </a:r>
-            <a:endParaRPr lang="en-US" sz="1600" dirty="0"/>
+              <a:t>5</a:t>
+            </a:r>
+            <a:endParaRPr lang="en-US" sz="1700" dirty="0"/>
+          </a:p>
+        </p:txBody>
+      </p:sp>
+      <p:sp>
+        <p:nvSpPr>
+          <p:cNvPr id="15" name="Shape 13"/>
+          <p:cNvSpPr/>
+          <p:nvPr/>
+        </p:nvSpPr>
+        <p:spPr>
+          <a:xfrm>
+            <a:off x="5806440" y="3017520"/>
+            <a:ext cx="5852160" cy="731520"/>
+          </a:xfrm>
+          <a:prstGeom prst="roundRect">
+            <a:avLst>
+              <a:gd name="adj" fmla="val 15000"/>
+            </a:avLst>
+          </a:prstGeom>
+          <a:solidFill>
+            <a:srgbClr val="FFFFFF"/>
+          </a:solidFill>
+          <a:ln w="15875">
+            <a:solidFill>
+              <a:srgbClr val="D9DEE7"/>
+            </a:solidFill>
+            <a:prstDash val="solid"/>
+          </a:ln>
+        </p:spPr>
+      </p:sp>
+      <p:sp>
+        <p:nvSpPr>
+          <p:cNvPr id="16" name="Shape 14"/>
+          <p:cNvSpPr/>
+          <p:nvPr/>
+        </p:nvSpPr>
+        <p:spPr>
+          <a:xfrm>
+            <a:off x="6080760" y="3163824"/>
+            <a:ext cx="438912" cy="438912"/>
+          </a:xfrm>
+          <a:prstGeom prst="roundRect">
+            <a:avLst>
+              <a:gd name="adj" fmla="val 20833"/>
+            </a:avLst>
+          </a:prstGeom>
+          <a:solidFill>
+            <a:srgbClr val="EEF2FB"/>
+          </a:solidFill>
+          <a:ln/>
+        </p:spPr>
+      </p:sp>
+      <p:sp>
+        <p:nvSpPr>
+          <p:cNvPr id="17" name="Text 15"/>
+          <p:cNvSpPr txBox="1"/>
+          <p:nvPr/>
+        </p:nvSpPr>
+        <p:spPr>
+          <a:xfrm>
+            <a:off x="6080760" y="3163824"/>
+            <a:ext cx="438912" cy="438912"/>
+          </a:xfrm>
+          <a:prstGeom prst="rect">
+            <a:avLst/>
+          </a:prstGeom>
+          <a:noFill/>
+          <a:ln/>
+        </p:spPr>
+        <p:txBody>
+          <a:bodyPr wrap="square" lIns="0" tIns="0" rIns="0" bIns="0" rtlCol="0" anchor="ctr"/>
+          <a:lstStyle/>
+          <a:p>
+            <a:pPr algn="ctr" indent="0" marL="0">
+              <a:buNone/>
+            </a:pPr>
+            <a:r>
+              <a:rPr lang="en-US" sz="1300" b="1" dirty="0">
+                <a:solidFill>
+                  <a:srgbClr val="2D63FF"/>
+                </a:solidFill>
+                <a:latin typeface="IBM Plex Mono" pitchFamily="34" charset="0"/>
+                <a:ea typeface="IBM Plex Mono" pitchFamily="34" charset="-122"/>
+                <a:cs typeface="IBM Plex Mono" pitchFamily="34" charset="-120"/>
+              </a:rPr>
+              <a:t>B</a:t>
+            </a:r>
+            <a:endParaRPr lang="en-US" sz="1300" dirty="0"/>
+          </a:p>
+        </p:txBody>
+      </p:sp>
+      <p:sp>
+        <p:nvSpPr>
+          <p:cNvPr id="18" name="Text 16"/>
+          <p:cNvSpPr txBox="1"/>
+          <p:nvPr/>
+        </p:nvSpPr>
+        <p:spPr>
+          <a:xfrm>
+            <a:off x="6720840" y="3017520"/>
+            <a:ext cx="4754880" cy="731520"/>
+          </a:xfrm>
+          <a:prstGeom prst="rect">
+            <a:avLst/>
+          </a:prstGeom>
+          <a:noFill/>
+          <a:ln/>
+        </p:spPr>
+        <p:txBody>
+          <a:bodyPr wrap="square" lIns="0" tIns="0" rIns="0" bIns="0" rtlCol="0" anchor="ctr"/>
+          <a:lstStyle/>
+          <a:p>
+            <a:pPr indent="0" marL="0">
+              <a:lnSpc>
+                <a:spcPct val="115000"/>
+              </a:lnSpc>
+              <a:buNone/>
+            </a:pPr>
+            <a:r>
+              <a:rPr lang="en-US" sz="1700" dirty="0">
+                <a:solidFill>
+                  <a:srgbClr val="101828"/>
+                </a:solidFill>
+                <a:latin typeface="IBM Plex Sans" pitchFamily="34" charset="0"/>
+                <a:ea typeface="IBM Plex Sans" pitchFamily="34" charset="-122"/>
+                <a:cs typeface="IBM Plex Sans" pitchFamily="34" charset="-120"/>
+              </a:rPr>
+              <a:t>5</a:t>
+            </a:r>
+            <a:endParaRPr lang="en-US" sz="1700" dirty="0"/>
+          </a:p>
+          <a:p>
+            <a:pPr indent="0" marL="0">
+              <a:lnSpc>
+                <a:spcPct val="115000"/>
+              </a:lnSpc>
+              <a:buNone/>
+            </a:pPr>
+            <a:r>
+              <a:rPr lang="en-US" sz="1700" dirty="0">
+                <a:solidFill>
+                  <a:srgbClr val="101828"/>
+                </a:solidFill>
+                <a:latin typeface="IBM Plex Sans" pitchFamily="34" charset="0"/>
+                <a:ea typeface="IBM Plex Sans" pitchFamily="34" charset="-122"/>
+                <a:cs typeface="IBM Plex Sans" pitchFamily="34" charset="-120"/>
+              </a:rPr>
+              <a:t>None</a:t>
+            </a:r>
+            <a:endParaRPr lang="en-US" sz="1700" dirty="0"/>
+          </a:p>
+        </p:txBody>
+      </p:sp>
+      <p:sp>
+        <p:nvSpPr>
+          <p:cNvPr id="19" name="Shape 17"/>
+          <p:cNvSpPr/>
+          <p:nvPr/>
+        </p:nvSpPr>
+        <p:spPr>
+          <a:xfrm>
+            <a:off x="5806440" y="3886200"/>
+            <a:ext cx="5852160" cy="731520"/>
+          </a:xfrm>
+          <a:prstGeom prst="roundRect">
+            <a:avLst>
+              <a:gd name="adj" fmla="val 15000"/>
+            </a:avLst>
+          </a:prstGeom>
+          <a:solidFill>
+            <a:srgbClr val="FFFFFF"/>
+          </a:solidFill>
+          <a:ln w="15875">
+            <a:solidFill>
+              <a:srgbClr val="D9DEE7"/>
+            </a:solidFill>
+            <a:prstDash val="solid"/>
+          </a:ln>
+        </p:spPr>
+      </p:sp>
+      <p:sp>
+        <p:nvSpPr>
+          <p:cNvPr id="20" name="Shape 18"/>
+          <p:cNvSpPr/>
+          <p:nvPr/>
+        </p:nvSpPr>
+        <p:spPr>
+          <a:xfrm>
+            <a:off x="6080760" y="4032504"/>
+            <a:ext cx="438912" cy="438912"/>
+          </a:xfrm>
+          <a:prstGeom prst="roundRect">
+            <a:avLst>
+              <a:gd name="adj" fmla="val 20833"/>
+            </a:avLst>
+          </a:prstGeom>
+          <a:solidFill>
+            <a:srgbClr val="EEF2FB"/>
+          </a:solidFill>
+          <a:ln/>
+        </p:spPr>
+      </p:sp>
+      <p:sp>
+        <p:nvSpPr>
+          <p:cNvPr id="21" name="Text 19"/>
+          <p:cNvSpPr txBox="1"/>
+          <p:nvPr/>
+        </p:nvSpPr>
+        <p:spPr>
+          <a:xfrm>
+            <a:off x="6080760" y="4032504"/>
+            <a:ext cx="438912" cy="438912"/>
+          </a:xfrm>
+          <a:prstGeom prst="rect">
+            <a:avLst/>
+          </a:prstGeom>
+          <a:noFill/>
+          <a:ln/>
+        </p:spPr>
+        <p:txBody>
+          <a:bodyPr wrap="square" lIns="0" tIns="0" rIns="0" bIns="0" rtlCol="0" anchor="ctr"/>
+          <a:lstStyle/>
+          <a:p>
+            <a:pPr algn="ctr" indent="0" marL="0">
+              <a:buNone/>
+            </a:pPr>
+            <a:r>
+              <a:rPr lang="en-US" sz="1300" b="1" dirty="0">
+                <a:solidFill>
+                  <a:srgbClr val="2D63FF"/>
+                </a:solidFill>
+                <a:latin typeface="IBM Plex Mono" pitchFamily="34" charset="0"/>
+                <a:ea typeface="IBM Plex Mono" pitchFamily="34" charset="-122"/>
+                <a:cs typeface="IBM Plex Mono" pitchFamily="34" charset="-120"/>
+              </a:rPr>
+              <a:t>C</a:t>
+            </a:r>
+            <a:endParaRPr lang="en-US" sz="1300" dirty="0"/>
+          </a:p>
+        </p:txBody>
+      </p:sp>
+      <p:sp>
+        <p:nvSpPr>
+          <p:cNvPr id="22" name="Text 20"/>
+          <p:cNvSpPr txBox="1"/>
+          <p:nvPr/>
+        </p:nvSpPr>
+        <p:spPr>
+          <a:xfrm>
+            <a:off x="6720840" y="3886200"/>
+            <a:ext cx="4754880" cy="731520"/>
+          </a:xfrm>
+          <a:prstGeom prst="rect">
+            <a:avLst/>
+          </a:prstGeom>
+          <a:noFill/>
+          <a:ln/>
+        </p:spPr>
+        <p:txBody>
+          <a:bodyPr wrap="square" lIns="0" tIns="0" rIns="0" bIns="0" rtlCol="0" anchor="ctr"/>
+          <a:lstStyle/>
+          <a:p>
+            <a:pPr indent="0" marL="0">
+              <a:lnSpc>
+                <a:spcPct val="115000"/>
+              </a:lnSpc>
+              <a:buNone/>
+            </a:pPr>
+            <a:r>
+              <a:rPr lang="en-US" sz="1700" dirty="0">
+                <a:solidFill>
+                  <a:srgbClr val="101828"/>
+                </a:solidFill>
+                <a:latin typeface="IBM Plex Sans" pitchFamily="34" charset="0"/>
+                <a:ea typeface="IBM Plex Sans" pitchFamily="34" charset="-122"/>
+                <a:cs typeface="IBM Plex Sans" pitchFamily="34" charset="-120"/>
+              </a:rPr>
+              <a:t>5</a:t>
+            </a:r>
+            <a:endParaRPr lang="en-US" sz="1700" dirty="0"/>
+          </a:p>
+          <a:p>
+            <a:pPr indent="0" marL="0">
+              <a:lnSpc>
+                <a:spcPct val="115000"/>
+              </a:lnSpc>
+              <a:buNone/>
+            </a:pPr>
+            <a:r>
+              <a:rPr lang="en-US" sz="1700" dirty="0">
+                <a:solidFill>
+                  <a:srgbClr val="101828"/>
+                </a:solidFill>
+                <a:latin typeface="IBM Plex Sans" pitchFamily="34" charset="0"/>
+                <a:ea typeface="IBM Plex Sans" pitchFamily="34" charset="-122"/>
+                <a:cs typeface="IBM Plex Sans" pitchFamily="34" charset="-120"/>
+              </a:rPr>
+              <a:t>5</a:t>
+            </a:r>
+            <a:endParaRPr lang="en-US" sz="1700" dirty="0"/>
           </a:p>
         </p:txBody>
       </p:sp>
@@ -3281,30 +3890,91 @@
       </p:sp>
       <p:sp>
         <p:nvSpPr>
-          <p:cNvPr id="5" name="Text 3"/>
-          <p:cNvSpPr txBox="1"/>
-          <p:nvPr/>
-        </p:nvSpPr>
-        <p:spPr>
-          <a:xfrm>
-            <a:off x="502920" y="411480"/>
-            <a:ext cx="11155680" cy="777240"/>
-          </a:xfrm>
-          <a:prstGeom prst="rect">
-            <a:avLst/>
-          </a:prstGeom>
-          <a:noFill/>
-          <a:ln/>
-        </p:spPr>
-        <p:txBody>
-          <a:bodyPr wrap="square" lIns="0" tIns="0" rIns="0" bIns="0" rtlCol="0" anchor="ctr"/>
-          <a:lstStyle/>
-          <a:p>
-            <a:pPr indent="0" marL="0">
-              <a:buNone/>
-            </a:pPr>
-            <a:r>
-              <a:rPr lang="en-US" sz="3200" b="1" dirty="0">
+          <p:cNvPr id="5" name="Shape 3"/>
+          <p:cNvSpPr/>
+          <p:nvPr/>
+        </p:nvSpPr>
+        <p:spPr>
+          <a:xfrm>
+            <a:off x="502920" y="438912"/>
+            <a:ext cx="3108960" cy="502920"/>
+          </a:xfrm>
+          <a:prstGeom prst="roundRect">
+            <a:avLst>
+              <a:gd name="adj" fmla="val 18182"/>
+            </a:avLst>
+          </a:prstGeom>
+          <a:solidFill>
+            <a:srgbClr val="F4B942"/>
+          </a:solidFill>
+          <a:ln/>
+        </p:spPr>
+      </p:sp>
+      <p:sp>
+        <p:nvSpPr>
+          <p:cNvPr id="6" name="Text 4"/>
+          <p:cNvSpPr txBox="1"/>
+          <p:nvPr/>
+        </p:nvSpPr>
+        <p:spPr>
+          <a:xfrm>
+            <a:off x="502920" y="438912"/>
+            <a:ext cx="3108960" cy="502920"/>
+          </a:xfrm>
+          <a:prstGeom prst="rect">
+            <a:avLst/>
+          </a:prstGeom>
+          <a:noFill/>
+          <a:ln/>
+        </p:spPr>
+        <p:txBody>
+          <a:bodyPr wrap="square" lIns="0" tIns="0" rIns="0" bIns="0" rtlCol="0" anchor="ctr"/>
+          <a:lstStyle/>
+          <a:p>
+            <a:pPr algn="ctr" indent="0" marL="0">
+              <a:buNone/>
+            </a:pPr>
+            <a:r>
+              <a:rPr lang="en-US" sz="1300" b="1" dirty="0">
+                <a:solidFill>
+                  <a:srgbClr val="101828"/>
+                </a:solidFill>
+                <a:latin typeface="IBM Plex Mono" pitchFamily="34" charset="0"/>
+                <a:ea typeface="IBM Plex Mono" pitchFamily="34" charset="-122"/>
+                <a:cs typeface="IBM Plex Mono" pitchFamily="34" charset="-120"/>
+              </a:rPr>
+              <a:t>★  FINAL CHALLENGE</a:t>
+            </a:r>
+            <a:endParaRPr lang="en-US" sz="1300" dirty="0"/>
+          </a:p>
+        </p:txBody>
+      </p:sp>
+      <p:sp>
+        <p:nvSpPr>
+          <p:cNvPr id="7" name="Text 5"/>
+          <p:cNvSpPr txBox="1"/>
+          <p:nvPr/>
+        </p:nvSpPr>
+        <p:spPr>
+          <a:xfrm>
+            <a:off x="502920" y="1097280"/>
+            <a:ext cx="11155680" cy="731520"/>
+          </a:xfrm>
+          <a:prstGeom prst="rect">
+            <a:avLst/>
+          </a:prstGeom>
+          <a:noFill/>
+          <a:ln/>
+        </p:spPr>
+        <p:txBody>
+          <a:bodyPr wrap="square" lIns="0" tIns="0" rIns="0" bIns="0" rtlCol="0" anchor="ctr"/>
+          <a:lstStyle/>
+          <a:p>
+            <a:pPr indent="0" marL="0">
+              <a:buNone/>
+            </a:pPr>
+            <a:r>
+              <a:rPr lang="en-US" sz="3400" b="1" dirty="0">
                 <a:solidFill>
                   <a:srgbClr val="101828"/>
                 </a:solidFill>
@@ -3312,65 +3982,26 @@
                 <a:ea typeface="IBM Plex Sans" pitchFamily="34" charset="-122"/>
                 <a:cs typeface="IBM Plex Sans" pitchFamily="34" charset="-120"/>
               </a:rPr>
-              <a:t>Worth knowing</a:t>
-            </a:r>
-            <a:endParaRPr lang="en-US" sz="3200" dirty="0"/>
-          </a:p>
-        </p:txBody>
-      </p:sp>
-      <p:sp>
-        <p:nvSpPr>
-          <p:cNvPr id="6" name="Text 4"/>
-          <p:cNvSpPr txBox="1"/>
-          <p:nvPr/>
-        </p:nvSpPr>
-        <p:spPr>
-          <a:xfrm>
-            <a:off x="502920" y="1170432"/>
-            <a:ext cx="11155680" cy="411480"/>
-          </a:xfrm>
-          <a:prstGeom prst="rect">
-            <a:avLst/>
-          </a:prstGeom>
-          <a:noFill/>
-          <a:ln/>
-        </p:spPr>
-        <p:txBody>
-          <a:bodyPr wrap="square" lIns="0" tIns="0" rIns="0" bIns="0" rtlCol="0" anchor="ctr"/>
-          <a:lstStyle/>
-          <a:p>
-            <a:pPr indent="0" marL="0">
-              <a:buNone/>
-            </a:pPr>
-            <a:r>
-              <a:rPr lang="en-US" sz="1500" dirty="0">
-                <a:solidFill>
-                  <a:srgbClr val="667085"/>
-                </a:solidFill>
-                <a:latin typeface="IBM Plex Sans" pitchFamily="34" charset="0"/>
-                <a:ea typeface="IBM Plex Sans" pitchFamily="34" charset="-122"/>
-                <a:cs typeface="IBM Plex Sans" pitchFamily="34" charset="-120"/>
-              </a:rPr>
-              <a:t>The information markers dotted around the room</a:t>
-            </a:r>
-            <a:endParaRPr lang="en-US" sz="1500" dirty="0"/>
-          </a:p>
-        </p:txBody>
-      </p:sp>
-      <p:sp>
-        <p:nvSpPr>
-          <p:cNvPr id="7" name="Shape 5"/>
+              <a:t>Function or procedure?</a:t>
+            </a:r>
+            <a:endParaRPr lang="en-US" sz="3400" dirty="0"/>
+          </a:p>
+        </p:txBody>
+      </p:sp>
+      <p:sp>
+        <p:nvSpPr>
+          <p:cNvPr id="8" name="Shape 6"/>
           <p:cNvSpPr/>
           <p:nvPr/>
         </p:nvSpPr>
         <p:spPr>
           <a:xfrm>
-            <a:off x="502920" y="1828800"/>
-            <a:ext cx="5394960" cy="1737360"/>
+            <a:off x="502920" y="2011680"/>
+            <a:ext cx="11155680" cy="2194560"/>
           </a:xfrm>
           <a:prstGeom prst="roundRect">
             <a:avLst>
-              <a:gd name="adj" fmla="val 6316"/>
+              <a:gd name="adj" fmla="val 5000"/>
             </a:avLst>
           </a:prstGeom>
           <a:solidFill>
@@ -3386,72 +4017,72 @@
       </p:sp>
       <p:sp>
         <p:nvSpPr>
-          <p:cNvPr id="8" name="Text 6"/>
-          <p:cNvSpPr txBox="1"/>
-          <p:nvPr/>
-        </p:nvSpPr>
-        <p:spPr>
-          <a:xfrm>
-            <a:off x="822960" y="2011680"/>
-            <a:ext cx="4754880" cy="365760"/>
-          </a:xfrm>
-          <a:prstGeom prst="rect">
-            <a:avLst/>
-          </a:prstGeom>
-          <a:noFill/>
-          <a:ln/>
-        </p:spPr>
-        <p:txBody>
-          <a:bodyPr wrap="square" lIns="0" tIns="0" rIns="0" bIns="0" rtlCol="0" anchor="ctr"/>
-          <a:lstStyle/>
-          <a:p>
-            <a:pPr indent="0" marL="0">
-              <a:buNone/>
-            </a:pPr>
-            <a:r>
-              <a:rPr lang="en-US" sz="1600" b="1" dirty="0">
-                <a:solidFill>
-                  <a:srgbClr val="2D63FF"/>
+          <p:cNvPr id="9" name="Text 7"/>
+          <p:cNvSpPr txBox="1"/>
+          <p:nvPr/>
+        </p:nvSpPr>
+        <p:spPr>
+          <a:xfrm>
+            <a:off x="1005840" y="2331720"/>
+            <a:ext cx="10149840" cy="1554480"/>
+          </a:xfrm>
+          <a:prstGeom prst="rect">
+            <a:avLst/>
+          </a:prstGeom>
+          <a:noFill/>
+          <a:ln/>
+        </p:spPr>
+        <p:txBody>
+          <a:bodyPr wrap="square" lIns="0" tIns="0" rIns="0" bIns="0" rtlCol="0" anchor="ctr"/>
+          <a:lstStyle/>
+          <a:p>
+            <a:pPr indent="0" marL="0">
+              <a:lnSpc>
+                <a:spcPct val="130000"/>
+              </a:lnSpc>
+              <a:buNone/>
+            </a:pPr>
+            <a:r>
+              <a:rPr lang="en-US" sz="2200" dirty="0">
+                <a:solidFill>
+                  <a:srgbClr val="101828"/>
                 </a:solidFill>
                 <a:latin typeface="IBM Plex Sans" pitchFamily="34" charset="0"/>
                 <a:ea typeface="IBM Plex Sans" pitchFamily="34" charset="-122"/>
                 <a:cs typeface="IBM Plex Sans" pitchFamily="34" charset="-120"/>
               </a:rPr>
-              <a:t>Why bother</a:t>
-            </a:r>
-            <a:endParaRPr lang="en-US" sz="1600" dirty="0"/>
-          </a:p>
-        </p:txBody>
-      </p:sp>
-      <p:sp>
-        <p:nvSpPr>
-          <p:cNvPr id="9" name="Text 7"/>
-          <p:cNvSpPr txBox="1"/>
-          <p:nvPr/>
-        </p:nvSpPr>
-        <p:spPr>
-          <a:xfrm>
-            <a:off x="822960" y="2395728"/>
-            <a:ext cx="4754880" cy="1005840"/>
-          </a:xfrm>
-          <a:prstGeom prst="rect">
-            <a:avLst/>
-          </a:prstGeom>
-          <a:noFill/>
-          <a:ln/>
-        </p:spPr>
-        <p:txBody>
-          <a:bodyPr wrap="square" lIns="0" tIns="0" rIns="0" bIns="0" rtlCol="0" anchor="t"/>
-          <a:lstStyle/>
-          <a:p>
-            <a:pPr indent="0" marL="0">
-              <a:lnSpc>
-                <a:spcPct val="120000"/>
-              </a:lnSpc>
-              <a:buNone/>
-            </a:pPr>
-            <a:r>
-              <a:rPr lang="en-US" sz="1300" dirty="0">
+              <a:t>Eight subprograms are described on the floor below you. Tap the star and decide whether each one is a function or a procedure.</a:t>
+            </a:r>
+            <a:endParaRPr lang="en-US" sz="2200" dirty="0"/>
+          </a:p>
+        </p:txBody>
+      </p:sp>
+      <p:sp>
+        <p:nvSpPr>
+          <p:cNvPr id="10" name="Text 8"/>
+          <p:cNvSpPr txBox="1"/>
+          <p:nvPr/>
+        </p:nvSpPr>
+        <p:spPr>
+          <a:xfrm>
+            <a:off x="502920" y="4526280"/>
+            <a:ext cx="11155680" cy="457200"/>
+          </a:xfrm>
+          <a:prstGeom prst="rect">
+            <a:avLst/>
+          </a:prstGeom>
+          <a:noFill/>
+          <a:ln/>
+        </p:spPr>
+        <p:txBody>
+          <a:bodyPr wrap="square" lIns="0" tIns="0" rIns="0" bIns="0" rtlCol="0" anchor="ctr"/>
+          <a:lstStyle/>
+          <a:p>
+            <a:pPr indent="0" marL="0">
+              <a:buNone/>
+            </a:pPr>
+            <a:r>
+              <a:rPr lang="en-US" sz="1600" dirty="0">
                 <a:solidFill>
                   <a:srgbClr val="667085"/>
                 </a:solidFill>
@@ -3459,333 +4090,9 @@
                 <a:ea typeface="IBM Plex Sans" pitchFamily="34" charset="-122"/>
                 <a:cs typeface="IBM Plex Sans" pitchFamily="34" charset="-120"/>
               </a:rPr>
-              <a:t>A job written once and called from four places is tested once and fixed once. The same lines copied four times are four bugs waiting to happen.</a:t>
-            </a:r>
-            <a:endParaRPr lang="en-US" sz="1300" dirty="0"/>
-          </a:p>
-        </p:txBody>
-      </p:sp>
-      <p:sp>
-        <p:nvSpPr>
-          <p:cNvPr id="10" name="Shape 8"/>
-          <p:cNvSpPr/>
-          <p:nvPr/>
-        </p:nvSpPr>
-        <p:spPr>
-          <a:xfrm>
-            <a:off x="6217920" y="1828800"/>
-            <a:ext cx="5394960" cy="1737360"/>
-          </a:xfrm>
-          <a:prstGeom prst="roundRect">
-            <a:avLst>
-              <a:gd name="adj" fmla="val 6316"/>
-            </a:avLst>
-          </a:prstGeom>
-          <a:solidFill>
-            <a:srgbClr val="FFFFFF"/>
-          </a:solidFill>
-          <a:ln w="15875">
-            <a:solidFill>
-              <a:srgbClr val="08A6A6"/>
-            </a:solidFill>
-            <a:prstDash val="solid"/>
-          </a:ln>
-        </p:spPr>
-      </p:sp>
-      <p:sp>
-        <p:nvSpPr>
-          <p:cNvPr id="11" name="Text 9"/>
-          <p:cNvSpPr txBox="1"/>
-          <p:nvPr/>
-        </p:nvSpPr>
-        <p:spPr>
-          <a:xfrm>
-            <a:off x="6537960" y="2011680"/>
-            <a:ext cx="4754880" cy="365760"/>
-          </a:xfrm>
-          <a:prstGeom prst="rect">
-            <a:avLst/>
-          </a:prstGeom>
-          <a:noFill/>
-          <a:ln/>
-        </p:spPr>
-        <p:txBody>
-          <a:bodyPr wrap="square" lIns="0" tIns="0" rIns="0" bIns="0" rtlCol="0" anchor="ctr"/>
-          <a:lstStyle/>
-          <a:p>
-            <a:pPr indent="0" marL="0">
-              <a:buNone/>
-            </a:pPr>
-            <a:r>
-              <a:rPr lang="en-US" sz="1600" b="1" dirty="0">
-                <a:solidFill>
-                  <a:srgbClr val="08A6A6"/>
-                </a:solidFill>
-                <a:latin typeface="IBM Plex Sans" pitchFamily="34" charset="0"/>
-                <a:ea typeface="IBM Plex Sans" pitchFamily="34" charset="-122"/>
-                <a:cs typeface="IBM Plex Sans" pitchFamily="34" charset="-120"/>
-              </a:rPr>
-              <a:t>Default values</a:t>
+              <a:t>Predict on paper first, then look down and test it.</a:t>
             </a:r>
             <a:endParaRPr lang="en-US" sz="1600" dirty="0"/>
-          </a:p>
-        </p:txBody>
-      </p:sp>
-      <p:sp>
-        <p:nvSpPr>
-          <p:cNvPr id="12" name="Text 10"/>
-          <p:cNvSpPr txBox="1"/>
-          <p:nvPr/>
-        </p:nvSpPr>
-        <p:spPr>
-          <a:xfrm>
-            <a:off x="6537960" y="2395728"/>
-            <a:ext cx="4754880" cy="1005840"/>
-          </a:xfrm>
-          <a:prstGeom prst="rect">
-            <a:avLst/>
-          </a:prstGeom>
-          <a:noFill/>
-          <a:ln/>
-        </p:spPr>
-        <p:txBody>
-          <a:bodyPr wrap="square" lIns="0" tIns="0" rIns="0" bIns="0" rtlCol="0" anchor="t"/>
-          <a:lstStyle/>
-          <a:p>
-            <a:pPr indent="0" marL="0">
-              <a:lnSpc>
-                <a:spcPct val="120000"/>
-              </a:lnSpc>
-              <a:buNone/>
-            </a:pPr>
-            <a:r>
-              <a:rPr lang="en-US" sz="1300" dirty="0">
-                <a:solidFill>
-                  <a:srgbClr val="667085"/>
-                </a:solidFill>
-                <a:latin typeface="IBM Plex Sans" pitchFamily="34" charset="0"/>
-                <a:ea typeface="IBM Plex Sans" pitchFamily="34" charset="-122"/>
-                <a:cs typeface="IBM Plex Sans" pitchFamily="34" charset="-120"/>
-              </a:rPr>
-              <a:t>A parameter can be given a default value in the definition, so the subprogram still runs when the caller leaves that argument out. The default is used only when no value is handed over.</a:t>
-            </a:r>
-            <a:endParaRPr lang="en-US" sz="1300" dirty="0"/>
-          </a:p>
-        </p:txBody>
-      </p:sp>
-      <p:sp>
-        <p:nvSpPr>
-          <p:cNvPr id="13" name="Shape 11"/>
-          <p:cNvSpPr/>
-          <p:nvPr/>
-        </p:nvSpPr>
-        <p:spPr>
-          <a:xfrm>
-            <a:off x="502920" y="3794760"/>
-            <a:ext cx="5394960" cy="1737360"/>
-          </a:xfrm>
-          <a:prstGeom prst="roundRect">
-            <a:avLst>
-              <a:gd name="adj" fmla="val 6316"/>
-            </a:avLst>
-          </a:prstGeom>
-          <a:solidFill>
-            <a:srgbClr val="FFFFFF"/>
-          </a:solidFill>
-          <a:ln w="15875">
-            <a:solidFill>
-              <a:srgbClr val="2D63FF"/>
-            </a:solidFill>
-            <a:prstDash val="solid"/>
-          </a:ln>
-        </p:spPr>
-      </p:sp>
-      <p:sp>
-        <p:nvSpPr>
-          <p:cNvPr id="14" name="Text 12"/>
-          <p:cNvSpPr txBox="1"/>
-          <p:nvPr/>
-        </p:nvSpPr>
-        <p:spPr>
-          <a:xfrm>
-            <a:off x="822960" y="3977640"/>
-            <a:ext cx="4754880" cy="365760"/>
-          </a:xfrm>
-          <a:prstGeom prst="rect">
-            <a:avLst/>
-          </a:prstGeom>
-          <a:noFill/>
-          <a:ln/>
-        </p:spPr>
-        <p:txBody>
-          <a:bodyPr wrap="square" lIns="0" tIns="0" rIns="0" bIns="0" rtlCol="0" anchor="ctr"/>
-          <a:lstStyle/>
-          <a:p>
-            <a:pPr indent="0" marL="0">
-              <a:buNone/>
-            </a:pPr>
-            <a:r>
-              <a:rPr lang="en-US" sz="1600" b="1" dirty="0">
-                <a:solidFill>
-                  <a:srgbClr val="2D63FF"/>
-                </a:solidFill>
-                <a:latin typeface="IBM Plex Sans" pitchFamily="34" charset="0"/>
-                <a:ea typeface="IBM Plex Sans" pitchFamily="34" charset="-122"/>
-                <a:cs typeface="IBM Plex Sans" pitchFamily="34" charset="-120"/>
-              </a:rPr>
-              <a:t>Returning more</a:t>
-            </a:r>
-            <a:endParaRPr lang="en-US" sz="1600" dirty="0"/>
-          </a:p>
-        </p:txBody>
-      </p:sp>
-      <p:sp>
-        <p:nvSpPr>
-          <p:cNvPr id="15" name="Text 13"/>
-          <p:cNvSpPr txBox="1"/>
-          <p:nvPr/>
-        </p:nvSpPr>
-        <p:spPr>
-          <a:xfrm>
-            <a:off x="822960" y="4361688"/>
-            <a:ext cx="4754880" cy="1005840"/>
-          </a:xfrm>
-          <a:prstGeom prst="rect">
-            <a:avLst/>
-          </a:prstGeom>
-          <a:noFill/>
-          <a:ln/>
-        </p:spPr>
-        <p:txBody>
-          <a:bodyPr wrap="square" lIns="0" tIns="0" rIns="0" bIns="0" rtlCol="0" anchor="t"/>
-          <a:lstStyle/>
-          <a:p>
-            <a:pPr indent="0" marL="0">
-              <a:lnSpc>
-                <a:spcPct val="120000"/>
-              </a:lnSpc>
-              <a:buNone/>
-            </a:pPr>
-            <a:r>
-              <a:rPr lang="en-US" sz="1300" dirty="0">
-                <a:solidFill>
-                  <a:srgbClr val="667085"/>
-                </a:solidFill>
-                <a:latin typeface="IBM Plex Sans" pitchFamily="34" charset="0"/>
-                <a:ea typeface="IBM Plex Sans" pitchFamily="34" charset="-122"/>
-                <a:cs typeface="IBM Plex Sans" pitchFamily="34" charset="-120"/>
-              </a:rPr>
-              <a:t>return can hand back several values at once, separated by commas, and the caller unpacks them.</a:t>
-            </a:r>
-            <a:endParaRPr lang="en-US" sz="1300" dirty="0"/>
-          </a:p>
-        </p:txBody>
-      </p:sp>
-      <p:sp>
-        <p:nvSpPr>
-          <p:cNvPr id="16" name="Shape 14"/>
-          <p:cNvSpPr/>
-          <p:nvPr/>
-        </p:nvSpPr>
-        <p:spPr>
-          <a:xfrm>
-            <a:off x="6217920" y="3794760"/>
-            <a:ext cx="5394960" cy="1737360"/>
-          </a:xfrm>
-          <a:prstGeom prst="roundRect">
-            <a:avLst>
-              <a:gd name="adj" fmla="val 6316"/>
-            </a:avLst>
-          </a:prstGeom>
-          <a:solidFill>
-            <a:srgbClr val="FFFFFF"/>
-          </a:solidFill>
-          <a:ln w="15875">
-            <a:solidFill>
-              <a:srgbClr val="08A6A6"/>
-            </a:solidFill>
-            <a:prstDash val="solid"/>
-          </a:ln>
-        </p:spPr>
-      </p:sp>
-      <p:sp>
-        <p:nvSpPr>
-          <p:cNvPr id="17" name="Text 15"/>
-          <p:cNvSpPr txBox="1"/>
-          <p:nvPr/>
-        </p:nvSpPr>
-        <p:spPr>
-          <a:xfrm>
-            <a:off x="6537960" y="3977640"/>
-            <a:ext cx="4754880" cy="365760"/>
-          </a:xfrm>
-          <a:prstGeom prst="rect">
-            <a:avLst/>
-          </a:prstGeom>
-          <a:noFill/>
-          <a:ln/>
-        </p:spPr>
-        <p:txBody>
-          <a:bodyPr wrap="square" lIns="0" tIns="0" rIns="0" bIns="0" rtlCol="0" anchor="ctr"/>
-          <a:lstStyle/>
-          <a:p>
-            <a:pPr indent="0" marL="0">
-              <a:buNone/>
-            </a:pPr>
-            <a:r>
-              <a:rPr lang="en-US" sz="1600" b="1" dirty="0">
-                <a:solidFill>
-                  <a:srgbClr val="08A6A6"/>
-                </a:solidFill>
-                <a:latin typeface="IBM Plex Sans" pitchFamily="34" charset="0"/>
-                <a:ea typeface="IBM Plex Sans" pitchFamily="34" charset="-122"/>
-                <a:cs typeface="IBM Plex Sans" pitchFamily="34" charset="-120"/>
-              </a:rPr>
-              <a:t>Already written</a:t>
-            </a:r>
-            <a:endParaRPr lang="en-US" sz="1600" dirty="0"/>
-          </a:p>
-        </p:txBody>
-      </p:sp>
-      <p:sp>
-        <p:nvSpPr>
-          <p:cNvPr id="18" name="Text 16"/>
-          <p:cNvSpPr txBox="1"/>
-          <p:nvPr/>
-        </p:nvSpPr>
-        <p:spPr>
-          <a:xfrm>
-            <a:off x="6537960" y="4361688"/>
-            <a:ext cx="4754880" cy="1005840"/>
-          </a:xfrm>
-          <a:prstGeom prst="rect">
-            <a:avLst/>
-          </a:prstGeom>
-          <a:noFill/>
-          <a:ln/>
-        </p:spPr>
-        <p:txBody>
-          <a:bodyPr wrap="square" lIns="0" tIns="0" rIns="0" bIns="0" rtlCol="0" anchor="t"/>
-          <a:lstStyle/>
-          <a:p>
-            <a:pPr indent="0" marL="0">
-              <a:lnSpc>
-                <a:spcPct val="120000"/>
-              </a:lnSpc>
-              <a:buNone/>
-            </a:pPr>
-            <a:r>
-              <a:rPr lang="en-US" sz="1300" dirty="0">
-                <a:solidFill>
-                  <a:srgbClr val="667085"/>
-                </a:solidFill>
-                <a:latin typeface="IBM Plex Sans" pitchFamily="34" charset="0"/>
-                <a:ea typeface="IBM Plex Sans" pitchFamily="34" charset="-122"/>
-                <a:cs typeface="IBM Plex Sans" pitchFamily="34" charset="-120"/>
-              </a:rPr>
-              <a:t>len(), int() and round() are functions somebody else wrote: you call them exactly the way you call your own.</a:t>
-            </a:r>
-            <a:endParaRPr lang="en-US" sz="1300" dirty="0"/>
           </a:p>
         </p:txBody>
       </p:sp>
@@ -3952,7 +4259,7 @@
                 <a:ea typeface="IBM Plex Sans" pitchFamily="34" charset="-122"/>
                 <a:cs typeface="IBM Plex Sans" pitchFamily="34" charset="-120"/>
               </a:rPr>
-              <a:t>Exam practice</a:t>
+              <a:t>Worth knowing</a:t>
             </a:r>
             <a:endParaRPr lang="en-US" sz="3200" dirty="0"/>
           </a:p>
@@ -3991,7 +4298,7 @@
                 <a:ea typeface="IBM Plex Sans" pitchFamily="34" charset="-122"/>
                 <a:cs typeface="IBM Plex Sans" pitchFamily="34" charset="-120"/>
               </a:rPr>
-              <a:t>Devices away. Answer from memory on the worksheet.</a:t>
+              <a:t>The information markers dotted around the room</a:t>
             </a:r>
             <a:endParaRPr lang="en-US" sz="1500" dirty="0"/>
           </a:p>
@@ -4006,11 +4313,11 @@
         <p:spPr>
           <a:xfrm>
             <a:off x="502920" y="1828800"/>
-            <a:ext cx="11155680" cy="1097280"/>
+            <a:ext cx="5394960" cy="1737360"/>
           </a:xfrm>
           <a:prstGeom prst="roundRect">
             <a:avLst>
-              <a:gd name="adj" fmla="val 10000"/>
+              <a:gd name="adj" fmla="val 6316"/>
             </a:avLst>
           </a:prstGeom>
           <a:solidFill>
@@ -4018,7 +4325,7 @@
           </a:solidFill>
           <a:ln w="15875">
             <a:solidFill>
-              <a:srgbClr val="D9DEE7"/>
+              <a:srgbClr val="2D63FF"/>
             </a:solidFill>
             <a:prstDash val="solid"/>
           </a:ln>
@@ -4032,557 +4339,93 @@
         </p:nvSpPr>
         <p:spPr>
           <a:xfrm>
-            <a:off x="914400" y="1938528"/>
-            <a:ext cx="9418320" cy="877824"/>
-          </a:xfrm>
-          <a:prstGeom prst="rect">
-            <a:avLst/>
-          </a:prstGeom>
-          <a:noFill/>
-          <a:ln/>
-        </p:spPr>
-        <p:txBody>
-          <a:bodyPr wrap="square" lIns="0" tIns="0" rIns="0" bIns="0" rtlCol="0" anchor="ctr"/>
-          <a:lstStyle/>
-          <a:p>
-            <a:pPr indent="0" marL="0">
-              <a:lnSpc>
-                <a:spcPct val="118000"/>
-              </a:lnSpc>
-              <a:buNone/>
-            </a:pPr>
-            <a:r>
-              <a:rPr lang="en-US" sz="1700" dirty="0">
-                <a:solidFill>
-                  <a:srgbClr val="101828"/>
+            <a:off x="822960" y="2011680"/>
+            <a:ext cx="4754880" cy="365760"/>
+          </a:xfrm>
+          <a:prstGeom prst="rect">
+            <a:avLst/>
+          </a:prstGeom>
+          <a:noFill/>
+          <a:ln/>
+        </p:spPr>
+        <p:txBody>
+          <a:bodyPr wrap="square" lIns="0" tIns="0" rIns="0" bIns="0" rtlCol="0" anchor="ctr"/>
+          <a:lstStyle/>
+          <a:p>
+            <a:pPr indent="0" marL="0">
+              <a:buNone/>
+            </a:pPr>
+            <a:r>
+              <a:rPr lang="en-US" sz="1600" b="1" dirty="0">
+                <a:solidFill>
+                  <a:srgbClr val="2D63FF"/>
                 </a:solidFill>
                 <a:latin typeface="IBM Plex Sans" pitchFamily="34" charset="0"/>
                 <a:ea typeface="IBM Plex Sans" pitchFamily="34" charset="-122"/>
                 <a:cs typeface="IBM Plex Sans" pitchFamily="34" charset="-120"/>
               </a:rPr>
-              <a:t>A function called </a:t>
-            </a:r>
+              <a:t>Why bother</a:t>
+            </a:r>
+            <a:endParaRPr lang="en-US" sz="1600" dirty="0"/>
+          </a:p>
+        </p:txBody>
+      </p:sp>
+      <p:sp>
+        <p:nvSpPr>
+          <p:cNvPr id="9" name="Text 7"/>
+          <p:cNvSpPr txBox="1"/>
+          <p:nvPr/>
+        </p:nvSpPr>
+        <p:spPr>
+          <a:xfrm>
+            <a:off x="822960" y="2395728"/>
+            <a:ext cx="4754880" cy="1005840"/>
+          </a:xfrm>
+          <a:prstGeom prst="rect">
+            <a:avLst/>
+          </a:prstGeom>
+          <a:noFill/>
+          <a:ln/>
+        </p:spPr>
+        <p:txBody>
+          <a:bodyPr wrap="square" lIns="0" tIns="0" rIns="0" bIns="0" rtlCol="0" anchor="t"/>
+          <a:lstStyle/>
+          <a:p>
             <a:pPr indent="0" marL="0">
               <a:lnSpc>
-                <a:spcPct val="118000"/>
+                <a:spcPct val="120000"/>
               </a:lnSpc>
               <a:buNone/>
             </a:pPr>
             <a:r>
-              <a:rPr lang="en-US" sz="1700" dirty="0">
-                <a:solidFill>
-                  <a:srgbClr val="18181B"/>
-                </a:solidFill>
-                <a:latin typeface="IBM Plex Mono" pitchFamily="34" charset="0"/>
-                <a:ea typeface="IBM Plex Mono" pitchFamily="34" charset="-122"/>
-                <a:cs typeface="IBM Plex Mono" pitchFamily="34" charset="-120"/>
-              </a:rPr>
-              <a:t>double</a:t>
-            </a:r>
-            <a:pPr indent="0" marL="0">
-              <a:lnSpc>
-                <a:spcPct val="118000"/>
-              </a:lnSpc>
-              <a:buNone/>
-            </a:pPr>
-            <a:r>
-              <a:rPr lang="en-US" sz="1700" dirty="0">
-                <a:solidFill>
-                  <a:srgbClr val="101828"/>
+              <a:rPr lang="en-US" sz="1300" dirty="0">
+                <a:solidFill>
+                  <a:srgbClr val="667085"/>
                 </a:solidFill>
                 <a:latin typeface="IBM Plex Sans" pitchFamily="34" charset="0"/>
                 <a:ea typeface="IBM Plex Sans" pitchFamily="34" charset="-122"/>
                 <a:cs typeface="IBM Plex Sans" pitchFamily="34" charset="-120"/>
               </a:rPr>
-              <a:t> holds one line, </a:t>
-            </a:r>
-            <a:pPr indent="0" marL="0">
-              <a:lnSpc>
-                <a:spcPct val="118000"/>
-              </a:lnSpc>
-              <a:buNone/>
-            </a:pPr>
-            <a:r>
-              <a:rPr lang="en-US" sz="1700" dirty="0">
-                <a:solidFill>
-                  <a:srgbClr val="1D4ED8"/>
-                </a:solidFill>
-                <a:latin typeface="IBM Plex Mono" pitchFamily="34" charset="0"/>
-                <a:ea typeface="IBM Plex Mono" pitchFamily="34" charset="-122"/>
-                <a:cs typeface="IBM Plex Mono" pitchFamily="34" charset="-120"/>
-              </a:rPr>
-              <a:t>print</a:t>
-            </a:r>
-            <a:pPr indent="0" marL="0">
-              <a:lnSpc>
-                <a:spcPct val="118000"/>
-              </a:lnSpc>
-              <a:buNone/>
-            </a:pPr>
-            <a:r>
-              <a:rPr lang="en-US" sz="1700" dirty="0">
-                <a:solidFill>
-                  <a:srgbClr val="3F3F46"/>
-                </a:solidFill>
-                <a:latin typeface="IBM Plex Mono" pitchFamily="34" charset="0"/>
-                <a:ea typeface="IBM Plex Mono" pitchFamily="34" charset="-122"/>
-                <a:cs typeface="IBM Plex Mono" pitchFamily="34" charset="-120"/>
-              </a:rPr>
-              <a:t>(</a:t>
-            </a:r>
-            <a:pPr indent="0" marL="0">
-              <a:lnSpc>
-                <a:spcPct val="118000"/>
-              </a:lnSpc>
-              <a:buNone/>
-            </a:pPr>
-            <a:r>
-              <a:rPr lang="en-US" sz="1700" dirty="0">
-                <a:solidFill>
-                  <a:srgbClr val="18181B"/>
-                </a:solidFill>
-                <a:latin typeface="IBM Plex Mono" pitchFamily="34" charset="0"/>
-                <a:ea typeface="IBM Plex Mono" pitchFamily="34" charset="-122"/>
-                <a:cs typeface="IBM Plex Mono" pitchFamily="34" charset="-120"/>
-              </a:rPr>
-              <a:t>n</a:t>
-            </a:r>
-            <a:pPr indent="0" marL="0">
-              <a:lnSpc>
-                <a:spcPct val="118000"/>
-              </a:lnSpc>
-              <a:buNone/>
-            </a:pPr>
-            <a:r>
-              <a:rPr lang="en-US" sz="1700" dirty="0">
-                <a:solidFill>
-                  <a:srgbClr val="18181B"/>
-                </a:solidFill>
-                <a:latin typeface="IBM Plex Mono" pitchFamily="34" charset="0"/>
-                <a:ea typeface="IBM Plex Mono" pitchFamily="34" charset="-122"/>
-                <a:cs typeface="IBM Plex Mono" pitchFamily="34" charset="-120"/>
-              </a:rPr>
-              <a:t> </a:t>
-            </a:r>
-            <a:pPr indent="0" marL="0">
-              <a:lnSpc>
-                <a:spcPct val="118000"/>
-              </a:lnSpc>
-              <a:buNone/>
-            </a:pPr>
-            <a:r>
-              <a:rPr lang="en-US" sz="1700" dirty="0">
-                <a:solidFill>
-                  <a:srgbClr val="3F3F46"/>
-                </a:solidFill>
-                <a:latin typeface="IBM Plex Mono" pitchFamily="34" charset="0"/>
-                <a:ea typeface="IBM Plex Mono" pitchFamily="34" charset="-122"/>
-                <a:cs typeface="IBM Plex Mono" pitchFamily="34" charset="-120"/>
-              </a:rPr>
-              <a:t>*</a:t>
-            </a:r>
-            <a:pPr indent="0" marL="0">
-              <a:lnSpc>
-                <a:spcPct val="118000"/>
-              </a:lnSpc>
-              <a:buNone/>
-            </a:pPr>
-            <a:r>
-              <a:rPr lang="en-US" sz="1700" dirty="0">
-                <a:solidFill>
-                  <a:srgbClr val="18181B"/>
-                </a:solidFill>
-                <a:latin typeface="IBM Plex Mono" pitchFamily="34" charset="0"/>
-                <a:ea typeface="IBM Plex Mono" pitchFamily="34" charset="-122"/>
-                <a:cs typeface="IBM Plex Mono" pitchFamily="34" charset="-120"/>
-              </a:rPr>
-              <a:t> </a:t>
-            </a:r>
-            <a:pPr indent="0" marL="0">
-              <a:lnSpc>
-                <a:spcPct val="118000"/>
-              </a:lnSpc>
-              <a:buNone/>
-            </a:pPr>
-            <a:r>
-              <a:rPr lang="en-US" sz="1700" dirty="0">
-                <a:solidFill>
-                  <a:srgbClr val="9A3412"/>
-                </a:solidFill>
-                <a:latin typeface="IBM Plex Mono" pitchFamily="34" charset="0"/>
-                <a:ea typeface="IBM Plex Mono" pitchFamily="34" charset="-122"/>
-                <a:cs typeface="IBM Plex Mono" pitchFamily="34" charset="-120"/>
-              </a:rPr>
-              <a:t>2</a:t>
-            </a:r>
-            <a:pPr indent="0" marL="0">
-              <a:lnSpc>
-                <a:spcPct val="118000"/>
-              </a:lnSpc>
-              <a:buNone/>
-            </a:pPr>
-            <a:r>
-              <a:rPr lang="en-US" sz="1700" dirty="0">
-                <a:solidFill>
-                  <a:srgbClr val="3F3F46"/>
-                </a:solidFill>
-                <a:latin typeface="IBM Plex Mono" pitchFamily="34" charset="0"/>
-                <a:ea typeface="IBM Plex Mono" pitchFamily="34" charset="-122"/>
-                <a:cs typeface="IBM Plex Mono" pitchFamily="34" charset="-120"/>
-              </a:rPr>
-              <a:t>)</a:t>
-            </a:r>
-            <a:pPr indent="0" marL="0">
-              <a:lnSpc>
-                <a:spcPct val="118000"/>
-              </a:lnSpc>
-              <a:buNone/>
-            </a:pPr>
-            <a:r>
-              <a:rPr lang="en-US" sz="1700" dirty="0">
-                <a:solidFill>
-                  <a:srgbClr val="101828"/>
-                </a:solidFill>
-                <a:latin typeface="IBM Plex Sans" pitchFamily="34" charset="0"/>
-                <a:ea typeface="IBM Plex Sans" pitchFamily="34" charset="-122"/>
-                <a:cs typeface="IBM Plex Sans" pitchFamily="34" charset="-120"/>
-              </a:rPr>
-              <a:t>. The main program writes </a:t>
-            </a:r>
-            <a:pPr indent="0" marL="0">
-              <a:lnSpc>
-                <a:spcPct val="118000"/>
-              </a:lnSpc>
-              <a:buNone/>
-            </a:pPr>
-            <a:r>
-              <a:rPr lang="en-US" sz="1700" dirty="0">
-                <a:solidFill>
-                  <a:srgbClr val="18181B"/>
-                </a:solidFill>
-                <a:latin typeface="IBM Plex Mono" pitchFamily="34" charset="0"/>
-                <a:ea typeface="IBM Plex Mono" pitchFamily="34" charset="-122"/>
-                <a:cs typeface="IBM Plex Mono" pitchFamily="34" charset="-120"/>
-              </a:rPr>
-              <a:t>answer</a:t>
-            </a:r>
-            <a:pPr indent="0" marL="0">
-              <a:lnSpc>
-                <a:spcPct val="118000"/>
-              </a:lnSpc>
-              <a:buNone/>
-            </a:pPr>
-            <a:r>
-              <a:rPr lang="en-US" sz="1700" dirty="0">
-                <a:solidFill>
-                  <a:srgbClr val="18181B"/>
-                </a:solidFill>
-                <a:latin typeface="IBM Plex Mono" pitchFamily="34" charset="0"/>
-                <a:ea typeface="IBM Plex Mono" pitchFamily="34" charset="-122"/>
-                <a:cs typeface="IBM Plex Mono" pitchFamily="34" charset="-120"/>
-              </a:rPr>
-              <a:t> </a:t>
-            </a:r>
-            <a:pPr indent="0" marL="0">
-              <a:lnSpc>
-                <a:spcPct val="118000"/>
-              </a:lnSpc>
-              <a:buNone/>
-            </a:pPr>
-            <a:r>
-              <a:rPr lang="en-US" sz="1700" dirty="0">
-                <a:solidFill>
-                  <a:srgbClr val="3F3F46"/>
-                </a:solidFill>
-                <a:latin typeface="IBM Plex Mono" pitchFamily="34" charset="0"/>
-                <a:ea typeface="IBM Plex Mono" pitchFamily="34" charset="-122"/>
-                <a:cs typeface="IBM Plex Mono" pitchFamily="34" charset="-120"/>
-              </a:rPr>
-              <a:t>=</a:t>
-            </a:r>
-            <a:pPr indent="0" marL="0">
-              <a:lnSpc>
-                <a:spcPct val="118000"/>
-              </a:lnSpc>
-              <a:buNone/>
-            </a:pPr>
-            <a:r>
-              <a:rPr lang="en-US" sz="1700" dirty="0">
-                <a:solidFill>
-                  <a:srgbClr val="18181B"/>
-                </a:solidFill>
-                <a:latin typeface="IBM Plex Mono" pitchFamily="34" charset="0"/>
-                <a:ea typeface="IBM Plex Mono" pitchFamily="34" charset="-122"/>
-                <a:cs typeface="IBM Plex Mono" pitchFamily="34" charset="-120"/>
-              </a:rPr>
-              <a:t> </a:t>
-            </a:r>
-            <a:pPr indent="0" marL="0">
-              <a:lnSpc>
-                <a:spcPct val="118000"/>
-              </a:lnSpc>
-              <a:buNone/>
-            </a:pPr>
-            <a:r>
-              <a:rPr lang="en-US" sz="1700" dirty="0">
-                <a:solidFill>
-                  <a:srgbClr val="18181B"/>
-                </a:solidFill>
-                <a:latin typeface="IBM Plex Mono" pitchFamily="34" charset="0"/>
-                <a:ea typeface="IBM Plex Mono" pitchFamily="34" charset="-122"/>
-                <a:cs typeface="IBM Plex Mono" pitchFamily="34" charset="-120"/>
-              </a:rPr>
-              <a:t>double</a:t>
-            </a:r>
-            <a:pPr indent="0" marL="0">
-              <a:lnSpc>
-                <a:spcPct val="118000"/>
-              </a:lnSpc>
-              <a:buNone/>
-            </a:pPr>
-            <a:r>
-              <a:rPr lang="en-US" sz="1700" dirty="0">
-                <a:solidFill>
-                  <a:srgbClr val="3F3F46"/>
-                </a:solidFill>
-                <a:latin typeface="IBM Plex Mono" pitchFamily="34" charset="0"/>
-                <a:ea typeface="IBM Plex Mono" pitchFamily="34" charset="-122"/>
-                <a:cs typeface="IBM Plex Mono" pitchFamily="34" charset="-120"/>
-              </a:rPr>
-              <a:t>(</a:t>
-            </a:r>
-            <a:pPr indent="0" marL="0">
-              <a:lnSpc>
-                <a:spcPct val="118000"/>
-              </a:lnSpc>
-              <a:buNone/>
-            </a:pPr>
-            <a:r>
-              <a:rPr lang="en-US" sz="1700" dirty="0">
-                <a:solidFill>
-                  <a:srgbClr val="9A3412"/>
-                </a:solidFill>
-                <a:latin typeface="IBM Plex Mono" pitchFamily="34" charset="0"/>
-                <a:ea typeface="IBM Plex Mono" pitchFamily="34" charset="-122"/>
-                <a:cs typeface="IBM Plex Mono" pitchFamily="34" charset="-120"/>
-              </a:rPr>
-              <a:t>7</a:t>
-            </a:r>
-            <a:pPr indent="0" marL="0">
-              <a:lnSpc>
-                <a:spcPct val="118000"/>
-              </a:lnSpc>
-              <a:buNone/>
-            </a:pPr>
-            <a:r>
-              <a:rPr lang="en-US" sz="1700" dirty="0">
-                <a:solidFill>
-                  <a:srgbClr val="3F3F46"/>
-                </a:solidFill>
-                <a:latin typeface="IBM Plex Mono" pitchFamily="34" charset="0"/>
-                <a:ea typeface="IBM Plex Mono" pitchFamily="34" charset="-122"/>
-                <a:cs typeface="IBM Plex Mono" pitchFamily="34" charset="-120"/>
-              </a:rPr>
-              <a:t>)</a:t>
-            </a:r>
-            <a:pPr indent="0" marL="0">
-              <a:lnSpc>
-                <a:spcPct val="118000"/>
-              </a:lnSpc>
-              <a:buNone/>
-            </a:pPr>
-            <a:r>
-              <a:rPr lang="en-US" sz="1700" dirty="0">
-                <a:solidFill>
-                  <a:srgbClr val="101828"/>
-                </a:solidFill>
-                <a:latin typeface="IBM Plex Sans" pitchFamily="34" charset="0"/>
-                <a:ea typeface="IBM Plex Sans" pitchFamily="34" charset="-122"/>
-                <a:cs typeface="IBM Plex Sans" pitchFamily="34" charset="-120"/>
-              </a:rPr>
-              <a:t> and then prints </a:t>
-            </a:r>
-            <a:pPr indent="0" marL="0">
-              <a:lnSpc>
-                <a:spcPct val="118000"/>
-              </a:lnSpc>
-              <a:buNone/>
-            </a:pPr>
-            <a:r>
-              <a:rPr lang="en-US" sz="1700" dirty="0">
-                <a:solidFill>
-                  <a:srgbClr val="18181B"/>
-                </a:solidFill>
-                <a:latin typeface="IBM Plex Mono" pitchFamily="34" charset="0"/>
-                <a:ea typeface="IBM Plex Mono" pitchFamily="34" charset="-122"/>
-                <a:cs typeface="IBM Plex Mono" pitchFamily="34" charset="-120"/>
-              </a:rPr>
-              <a:t>answer</a:t>
-            </a:r>
-            <a:pPr indent="0" marL="0">
-              <a:lnSpc>
-                <a:spcPct val="118000"/>
-              </a:lnSpc>
-              <a:buNone/>
-            </a:pPr>
-            <a:r>
-              <a:rPr lang="en-US" sz="1700" dirty="0">
-                <a:solidFill>
-                  <a:srgbClr val="101828"/>
-                </a:solidFill>
-                <a:latin typeface="IBM Plex Sans" pitchFamily="34" charset="0"/>
-                <a:ea typeface="IBM Plex Sans" pitchFamily="34" charset="-122"/>
-                <a:cs typeface="IBM Plex Sans" pitchFamily="34" charset="-120"/>
-              </a:rPr>
-              <a:t>, which shows </a:t>
-            </a:r>
-            <a:pPr indent="0" marL="0">
-              <a:lnSpc>
-                <a:spcPct val="118000"/>
-              </a:lnSpc>
-              <a:buNone/>
-            </a:pPr>
-            <a:r>
-              <a:rPr lang="en-US" sz="1700" dirty="0">
-                <a:solidFill>
-                  <a:srgbClr val="6B21A8"/>
-                </a:solidFill>
-                <a:latin typeface="IBM Plex Mono" pitchFamily="34" charset="0"/>
-                <a:ea typeface="IBM Plex Mono" pitchFamily="34" charset="-122"/>
-                <a:cs typeface="IBM Plex Mono" pitchFamily="34" charset="-120"/>
-              </a:rPr>
-              <a:t>None</a:t>
-            </a:r>
-            <a:pPr indent="0" marL="0">
-              <a:lnSpc>
-                <a:spcPct val="118000"/>
-              </a:lnSpc>
-              <a:buNone/>
-            </a:pPr>
-            <a:r>
-              <a:rPr lang="en-US" sz="1700" dirty="0">
-                <a:solidFill>
-                  <a:srgbClr val="101828"/>
-                </a:solidFill>
-                <a:latin typeface="IBM Plex Sans" pitchFamily="34" charset="0"/>
-                <a:ea typeface="IBM Plex Sans" pitchFamily="34" charset="-122"/>
-                <a:cs typeface="IBM Plex Sans" pitchFamily="34" charset="-120"/>
-              </a:rPr>
-              <a:t>. Explain why </a:t>
-            </a:r>
-            <a:pPr indent="0" marL="0">
-              <a:lnSpc>
-                <a:spcPct val="118000"/>
-              </a:lnSpc>
-              <a:buNone/>
-            </a:pPr>
-            <a:r>
-              <a:rPr lang="en-US" sz="1700" dirty="0">
-                <a:solidFill>
-                  <a:srgbClr val="6B21A8"/>
-                </a:solidFill>
-                <a:latin typeface="IBM Plex Mono" pitchFamily="34" charset="0"/>
-                <a:ea typeface="IBM Plex Mono" pitchFamily="34" charset="-122"/>
-                <a:cs typeface="IBM Plex Mono" pitchFamily="34" charset="-120"/>
-              </a:rPr>
-              <a:t>None</a:t>
-            </a:r>
-            <a:pPr indent="0" marL="0">
-              <a:lnSpc>
-                <a:spcPct val="118000"/>
-              </a:lnSpc>
-              <a:buNone/>
-            </a:pPr>
-            <a:r>
-              <a:rPr lang="en-US" sz="1700" dirty="0">
-                <a:solidFill>
-                  <a:srgbClr val="101828"/>
-                </a:solidFill>
-                <a:latin typeface="IBM Plex Sans" pitchFamily="34" charset="0"/>
-                <a:ea typeface="IBM Plex Sans" pitchFamily="34" charset="-122"/>
-                <a:cs typeface="IBM Plex Sans" pitchFamily="34" charset="-120"/>
-              </a:rPr>
-              <a:t> is printed, and write the line inside double corrected.</a:t>
-            </a:r>
-            <a:endParaRPr lang="en-US" sz="1700" dirty="0"/>
-          </a:p>
-        </p:txBody>
-      </p:sp>
-      <p:sp>
-        <p:nvSpPr>
-          <p:cNvPr id="9" name="Shape 7"/>
+              <a:t>A job written once and called from four places is tested once and fixed once. The same lines copied four times are four bugs waiting to happen.</a:t>
+            </a:r>
+            <a:endParaRPr lang="en-US" sz="1300" dirty="0"/>
+          </a:p>
+        </p:txBody>
+      </p:sp>
+      <p:sp>
+        <p:nvSpPr>
+          <p:cNvPr id="10" name="Shape 8"/>
           <p:cNvSpPr/>
           <p:nvPr/>
         </p:nvSpPr>
         <p:spPr>
           <a:xfrm>
-            <a:off x="10515600" y="2130552"/>
-            <a:ext cx="868680" cy="493776"/>
+            <a:off x="6217920" y="1828800"/>
+            <a:ext cx="5394960" cy="1737360"/>
           </a:xfrm>
           <a:prstGeom prst="roundRect">
             <a:avLst>
-              <a:gd name="adj" fmla="val 18519"/>
-            </a:avLst>
-          </a:prstGeom>
-          <a:solidFill>
-            <a:srgbClr val="EEF2FB"/>
-          </a:solidFill>
-          <a:ln/>
-        </p:spPr>
-      </p:sp>
-      <p:sp>
-        <p:nvSpPr>
-          <p:cNvPr id="10" name="Text 8"/>
-          <p:cNvSpPr txBox="1"/>
-          <p:nvPr/>
-        </p:nvSpPr>
-        <p:spPr>
-          <a:xfrm>
-            <a:off x="10515600" y="2130552"/>
-            <a:ext cx="868680" cy="493776"/>
-          </a:xfrm>
-          <a:prstGeom prst="rect">
-            <a:avLst/>
-          </a:prstGeom>
-          <a:noFill/>
-          <a:ln/>
-        </p:spPr>
-        <p:txBody>
-          <a:bodyPr wrap="square" lIns="0" tIns="0" rIns="0" bIns="0" rtlCol="0" anchor="ctr"/>
-          <a:lstStyle/>
-          <a:p>
-            <a:pPr algn="ctr" indent="0" marL="0">
-              <a:buNone/>
-            </a:pPr>
-            <a:r>
-              <a:rPr lang="en-US" sz="1500" b="1" dirty="0">
-                <a:solidFill>
-                  <a:srgbClr val="2D63FF"/>
-                </a:solidFill>
-                <a:latin typeface="IBM Plex Mono" pitchFamily="34" charset="0"/>
-                <a:ea typeface="IBM Plex Mono" pitchFamily="34" charset="-122"/>
-                <a:cs typeface="IBM Plex Mono" pitchFamily="34" charset="-120"/>
-              </a:rPr>
-              <a:t>[3]</a:t>
-            </a:r>
-            <a:endParaRPr lang="en-US" sz="1500" dirty="0"/>
-          </a:p>
-        </p:txBody>
-      </p:sp>
-      <p:sp>
-        <p:nvSpPr>
-          <p:cNvPr id="11" name="Shape 9"/>
-          <p:cNvSpPr/>
-          <p:nvPr/>
-        </p:nvSpPr>
-        <p:spPr>
-          <a:xfrm>
-            <a:off x="502920" y="3127248"/>
-            <a:ext cx="11155680" cy="1097280"/>
-          </a:xfrm>
-          <a:prstGeom prst="roundRect">
-            <a:avLst>
-              <a:gd name="adj" fmla="val 10000"/>
+              <a:gd name="adj" fmla="val 6316"/>
             </a:avLst>
           </a:prstGeom>
           <a:solidFill>
@@ -4590,7 +4433,7 @@
           </a:solidFill>
           <a:ln w="15875">
             <a:solidFill>
-              <a:srgbClr val="D9DEE7"/>
+              <a:srgbClr val="08A6A6"/>
             </a:solidFill>
             <a:prstDash val="solid"/>
           </a:ln>
@@ -4598,43 +4441,82 @@
       </p:sp>
       <p:sp>
         <p:nvSpPr>
-          <p:cNvPr id="12" name="Text 10"/>
-          <p:cNvSpPr txBox="1"/>
-          <p:nvPr/>
-        </p:nvSpPr>
-        <p:spPr>
-          <a:xfrm>
-            <a:off x="914400" y="3236976"/>
-            <a:ext cx="9418320" cy="877824"/>
-          </a:xfrm>
-          <a:prstGeom prst="rect">
-            <a:avLst/>
-          </a:prstGeom>
-          <a:noFill/>
-          <a:ln/>
-        </p:spPr>
-        <p:txBody>
-          <a:bodyPr wrap="square" lIns="0" tIns="0" rIns="0" bIns="0" rtlCol="0" anchor="ctr"/>
-          <a:lstStyle/>
-          <a:p>
-            <a:pPr indent="0" marL="0">
-              <a:lnSpc>
-                <a:spcPct val="118000"/>
-              </a:lnSpc>
-              <a:buNone/>
-            </a:pPr>
-            <a:r>
-              <a:rPr lang="en-US" sz="1700" dirty="0">
-                <a:solidFill>
-                  <a:srgbClr val="101828"/>
+          <p:cNvPr id="11" name="Text 9"/>
+          <p:cNvSpPr txBox="1"/>
+          <p:nvPr/>
+        </p:nvSpPr>
+        <p:spPr>
+          <a:xfrm>
+            <a:off x="6537960" y="2011680"/>
+            <a:ext cx="4754880" cy="365760"/>
+          </a:xfrm>
+          <a:prstGeom prst="rect">
+            <a:avLst/>
+          </a:prstGeom>
+          <a:noFill/>
+          <a:ln/>
+        </p:spPr>
+        <p:txBody>
+          <a:bodyPr wrap="square" lIns="0" tIns="0" rIns="0" bIns="0" rtlCol="0" anchor="ctr"/>
+          <a:lstStyle/>
+          <a:p>
+            <a:pPr indent="0" marL="0">
+              <a:buNone/>
+            </a:pPr>
+            <a:r>
+              <a:rPr lang="en-US" sz="1600" b="1" dirty="0">
+                <a:solidFill>
+                  <a:srgbClr val="08A6A6"/>
                 </a:solidFill>
                 <a:latin typeface="IBM Plex Sans" pitchFamily="34" charset="0"/>
                 <a:ea typeface="IBM Plex Sans" pitchFamily="34" charset="-122"/>
                 <a:cs typeface="IBM Plex Sans" pitchFamily="34" charset="-120"/>
               </a:rPr>
-              <a:t>Write a function that takes two whole numbers and returns the larger of them, and a main program that reads two numbers and prints the value the function hands back.</a:t>
-            </a:r>
-            <a:endParaRPr lang="en-US" sz="1700" dirty="0"/>
+              <a:t>Default values</a:t>
+            </a:r>
+            <a:endParaRPr lang="en-US" sz="1600" dirty="0"/>
+          </a:p>
+        </p:txBody>
+      </p:sp>
+      <p:sp>
+        <p:nvSpPr>
+          <p:cNvPr id="12" name="Text 10"/>
+          <p:cNvSpPr txBox="1"/>
+          <p:nvPr/>
+        </p:nvSpPr>
+        <p:spPr>
+          <a:xfrm>
+            <a:off x="6537960" y="2395728"/>
+            <a:ext cx="4754880" cy="1005840"/>
+          </a:xfrm>
+          <a:prstGeom prst="rect">
+            <a:avLst/>
+          </a:prstGeom>
+          <a:noFill/>
+          <a:ln/>
+        </p:spPr>
+        <p:txBody>
+          <a:bodyPr wrap="square" lIns="0" tIns="0" rIns="0" bIns="0" rtlCol="0" anchor="t"/>
+          <a:lstStyle/>
+          <a:p>
+            <a:pPr indent="0" marL="0">
+              <a:lnSpc>
+                <a:spcPct val="120000"/>
+              </a:lnSpc>
+              <a:buNone/>
+            </a:pPr>
+            <a:r>
+              <a:rPr lang="en-US" sz="1300" dirty="0">
+                <a:solidFill>
+                  <a:srgbClr val="667085"/>
+                </a:solidFill>
+                <a:latin typeface="IBM Plex Sans" pitchFamily="34" charset="0"/>
+                <a:ea typeface="IBM Plex Sans" pitchFamily="34" charset="-122"/>
+                <a:cs typeface="IBM Plex Sans" pitchFamily="34" charset="-120"/>
+              </a:rPr>
+              <a:t>A parameter can be given a default value in the definition, so the subprogram still runs when the caller leaves that argument out. The default is used only when no value is handed over.</a:t>
+            </a:r>
+            <a:endParaRPr lang="en-US" sz="1300" dirty="0"/>
           </a:p>
         </p:txBody>
       </p:sp>
@@ -4646,73 +4528,12 @@
         </p:nvSpPr>
         <p:spPr>
           <a:xfrm>
-            <a:off x="10515600" y="3429000"/>
-            <a:ext cx="868680" cy="493776"/>
+            <a:off x="502920" y="3794760"/>
+            <a:ext cx="5394960" cy="1737360"/>
           </a:xfrm>
           <a:prstGeom prst="roundRect">
             <a:avLst>
-              <a:gd name="adj" fmla="val 18519"/>
-            </a:avLst>
-          </a:prstGeom>
-          <a:solidFill>
-            <a:srgbClr val="EEF2FB"/>
-          </a:solidFill>
-          <a:ln/>
-        </p:spPr>
-      </p:sp>
-      <p:sp>
-        <p:nvSpPr>
-          <p:cNvPr id="14" name="Text 12"/>
-          <p:cNvSpPr txBox="1"/>
-          <p:nvPr/>
-        </p:nvSpPr>
-        <p:spPr>
-          <a:xfrm>
-            <a:off x="10515600" y="3429000"/>
-            <a:ext cx="868680" cy="493776"/>
-          </a:xfrm>
-          <a:prstGeom prst="rect">
-            <a:avLst/>
-          </a:prstGeom>
-          <a:noFill/>
-          <a:ln/>
-        </p:spPr>
-        <p:txBody>
-          <a:bodyPr wrap="square" lIns="0" tIns="0" rIns="0" bIns="0" rtlCol="0" anchor="ctr"/>
-          <a:lstStyle/>
-          <a:p>
-            <a:pPr algn="ctr" indent="0" marL="0">
-              <a:buNone/>
-            </a:pPr>
-            <a:r>
-              <a:rPr lang="en-US" sz="1500" b="1" dirty="0">
-                <a:solidFill>
-                  <a:srgbClr val="2D63FF"/>
-                </a:solidFill>
-                <a:latin typeface="IBM Plex Mono" pitchFamily="34" charset="0"/>
-                <a:ea typeface="IBM Plex Mono" pitchFamily="34" charset="-122"/>
-                <a:cs typeface="IBM Plex Mono" pitchFamily="34" charset="-120"/>
-              </a:rPr>
-              <a:t>[5]</a:t>
-            </a:r>
-            <a:endParaRPr lang="en-US" sz="1500" dirty="0"/>
-          </a:p>
-        </p:txBody>
-      </p:sp>
-      <p:sp>
-        <p:nvSpPr>
-          <p:cNvPr id="15" name="Shape 13"/>
-          <p:cNvSpPr/>
-          <p:nvPr/>
-        </p:nvSpPr>
-        <p:spPr>
-          <a:xfrm>
-            <a:off x="502920" y="4425696"/>
-            <a:ext cx="11155680" cy="1097280"/>
-          </a:xfrm>
-          <a:prstGeom prst="roundRect">
-            <a:avLst>
-              <a:gd name="adj" fmla="val 10000"/>
+              <a:gd name="adj" fmla="val 6316"/>
             </a:avLst>
           </a:prstGeom>
           <a:solidFill>
@@ -4720,7 +4541,7 @@
           </a:solidFill>
           <a:ln w="15875">
             <a:solidFill>
-              <a:srgbClr val="D9DEE7"/>
+              <a:srgbClr val="2D63FF"/>
             </a:solidFill>
             <a:prstDash val="solid"/>
           </a:ln>
@@ -4728,67 +4549,150 @@
       </p:sp>
       <p:sp>
         <p:nvSpPr>
-          <p:cNvPr id="16" name="Text 14"/>
-          <p:cNvSpPr txBox="1"/>
-          <p:nvPr/>
-        </p:nvSpPr>
-        <p:spPr>
-          <a:xfrm>
-            <a:off x="914400" y="4535424"/>
-            <a:ext cx="9418320" cy="877824"/>
-          </a:xfrm>
-          <a:prstGeom prst="rect">
-            <a:avLst/>
-          </a:prstGeom>
-          <a:noFill/>
-          <a:ln/>
-        </p:spPr>
-        <p:txBody>
-          <a:bodyPr wrap="square" lIns="0" tIns="0" rIns="0" bIns="0" rtlCol="0" anchor="ctr"/>
-          <a:lstStyle/>
-          <a:p>
-            <a:pPr indent="0" marL="0">
-              <a:lnSpc>
-                <a:spcPct val="118000"/>
-              </a:lnSpc>
-              <a:buNone/>
-            </a:pPr>
-            <a:r>
-              <a:rPr lang="en-US" sz="1700" dirty="0">
-                <a:solidFill>
-                  <a:srgbClr val="101828"/>
+          <p:cNvPr id="14" name="Text 12"/>
+          <p:cNvSpPr txBox="1"/>
+          <p:nvPr/>
+        </p:nvSpPr>
+        <p:spPr>
+          <a:xfrm>
+            <a:off x="822960" y="3977640"/>
+            <a:ext cx="4754880" cy="365760"/>
+          </a:xfrm>
+          <a:prstGeom prst="rect">
+            <a:avLst/>
+          </a:prstGeom>
+          <a:noFill/>
+          <a:ln/>
+        </p:spPr>
+        <p:txBody>
+          <a:bodyPr wrap="square" lIns="0" tIns="0" rIns="0" bIns="0" rtlCol="0" anchor="ctr"/>
+          <a:lstStyle/>
+          <a:p>
+            <a:pPr indent="0" marL="0">
+              <a:buNone/>
+            </a:pPr>
+            <a:r>
+              <a:rPr lang="en-US" sz="1600" b="1" dirty="0">
+                <a:solidFill>
+                  <a:srgbClr val="2D63FF"/>
                 </a:solidFill>
                 <a:latin typeface="IBM Plex Sans" pitchFamily="34" charset="0"/>
                 <a:ea typeface="IBM Plex Sans" pitchFamily="34" charset="-122"/>
                 <a:cs typeface="IBM Plex Sans" pitchFamily="34" charset="-120"/>
               </a:rPr>
-              <a:t>Write a procedure that takes a word and a whole number and prints them on one line with a single space between them, then call it for three different pairs of values.</a:t>
-            </a:r>
-            <a:endParaRPr lang="en-US" sz="1700" dirty="0"/>
-          </a:p>
-        </p:txBody>
-      </p:sp>
-      <p:sp>
-        <p:nvSpPr>
-          <p:cNvPr id="17" name="Shape 15"/>
+              <a:t>Returning more</a:t>
+            </a:r>
+            <a:endParaRPr lang="en-US" sz="1600" dirty="0"/>
+          </a:p>
+        </p:txBody>
+      </p:sp>
+      <p:sp>
+        <p:nvSpPr>
+          <p:cNvPr id="15" name="Text 13"/>
+          <p:cNvSpPr txBox="1"/>
+          <p:nvPr/>
+        </p:nvSpPr>
+        <p:spPr>
+          <a:xfrm>
+            <a:off x="822960" y="4361688"/>
+            <a:ext cx="4754880" cy="1005840"/>
+          </a:xfrm>
+          <a:prstGeom prst="rect">
+            <a:avLst/>
+          </a:prstGeom>
+          <a:noFill/>
+          <a:ln/>
+        </p:spPr>
+        <p:txBody>
+          <a:bodyPr wrap="square" lIns="0" tIns="0" rIns="0" bIns="0" rtlCol="0" anchor="t"/>
+          <a:lstStyle/>
+          <a:p>
+            <a:pPr indent="0" marL="0">
+              <a:lnSpc>
+                <a:spcPct val="120000"/>
+              </a:lnSpc>
+              <a:buNone/>
+            </a:pPr>
+            <a:r>
+              <a:rPr lang="en-US" sz="1300" dirty="0">
+                <a:solidFill>
+                  <a:srgbClr val="667085"/>
+                </a:solidFill>
+                <a:latin typeface="IBM Plex Sans" pitchFamily="34" charset="0"/>
+                <a:ea typeface="IBM Plex Sans" pitchFamily="34" charset="-122"/>
+                <a:cs typeface="IBM Plex Sans" pitchFamily="34" charset="-120"/>
+              </a:rPr>
+              <a:t>return can hand back several values at once, separated by commas, and the caller unpacks them.</a:t>
+            </a:r>
+            <a:endParaRPr lang="en-US" sz="1300" dirty="0"/>
+          </a:p>
+        </p:txBody>
+      </p:sp>
+      <p:sp>
+        <p:nvSpPr>
+          <p:cNvPr id="16" name="Shape 14"/>
           <p:cNvSpPr/>
           <p:nvPr/>
         </p:nvSpPr>
         <p:spPr>
           <a:xfrm>
-            <a:off x="10515600" y="4727448"/>
-            <a:ext cx="868680" cy="493776"/>
+            <a:off x="6217920" y="3794760"/>
+            <a:ext cx="5394960" cy="1737360"/>
           </a:xfrm>
           <a:prstGeom prst="roundRect">
             <a:avLst>
-              <a:gd name="adj" fmla="val 18519"/>
+              <a:gd name="adj" fmla="val 6316"/>
             </a:avLst>
           </a:prstGeom>
           <a:solidFill>
-            <a:srgbClr val="EEF2FB"/>
+            <a:srgbClr val="FFFFFF"/>
           </a:solidFill>
-          <a:ln/>
-        </p:spPr>
+          <a:ln w="15875">
+            <a:solidFill>
+              <a:srgbClr val="08A6A6"/>
+            </a:solidFill>
+            <a:prstDash val="solid"/>
+          </a:ln>
+        </p:spPr>
+      </p:sp>
+      <p:sp>
+        <p:nvSpPr>
+          <p:cNvPr id="17" name="Text 15"/>
+          <p:cNvSpPr txBox="1"/>
+          <p:nvPr/>
+        </p:nvSpPr>
+        <p:spPr>
+          <a:xfrm>
+            <a:off x="6537960" y="3977640"/>
+            <a:ext cx="4754880" cy="365760"/>
+          </a:xfrm>
+          <a:prstGeom prst="rect">
+            <a:avLst/>
+          </a:prstGeom>
+          <a:noFill/>
+          <a:ln/>
+        </p:spPr>
+        <p:txBody>
+          <a:bodyPr wrap="square" lIns="0" tIns="0" rIns="0" bIns="0" rtlCol="0" anchor="ctr"/>
+          <a:lstStyle/>
+          <a:p>
+            <a:pPr indent="0" marL="0">
+              <a:buNone/>
+            </a:pPr>
+            <a:r>
+              <a:rPr lang="en-US" sz="1600" b="1" dirty="0">
+                <a:solidFill>
+                  <a:srgbClr val="08A6A6"/>
+                </a:solidFill>
+                <a:latin typeface="IBM Plex Sans" pitchFamily="34" charset="0"/>
+                <a:ea typeface="IBM Plex Sans" pitchFamily="34" charset="-122"/>
+                <a:cs typeface="IBM Plex Sans" pitchFamily="34" charset="-120"/>
+              </a:rPr>
+              <a:t>Already written</a:t>
+            </a:r>
+            <a:endParaRPr lang="en-US" sz="1600" dirty="0"/>
+          </a:p>
+        </p:txBody>
       </p:sp>
       <p:sp>
         <p:nvSpPr>
@@ -4798,34 +4702,37 @@
         </p:nvSpPr>
         <p:spPr>
           <a:xfrm>
-            <a:off x="10515600" y="4727448"/>
-            <a:ext cx="868680" cy="493776"/>
-          </a:xfrm>
-          <a:prstGeom prst="rect">
-            <a:avLst/>
-          </a:prstGeom>
-          <a:noFill/>
-          <a:ln/>
-        </p:spPr>
-        <p:txBody>
-          <a:bodyPr wrap="square" lIns="0" tIns="0" rIns="0" bIns="0" rtlCol="0" anchor="ctr"/>
-          <a:lstStyle/>
-          <a:p>
-            <a:pPr algn="ctr" indent="0" marL="0">
-              <a:buNone/>
-            </a:pPr>
-            <a:r>
-              <a:rPr lang="en-US" sz="1500" b="1" dirty="0">
-                <a:solidFill>
-                  <a:srgbClr val="2D63FF"/>
-                </a:solidFill>
-                <a:latin typeface="IBM Plex Mono" pitchFamily="34" charset="0"/>
-                <a:ea typeface="IBM Plex Mono" pitchFamily="34" charset="-122"/>
-                <a:cs typeface="IBM Plex Mono" pitchFamily="34" charset="-120"/>
-              </a:rPr>
-              <a:t>[4]</a:t>
-            </a:r>
-            <a:endParaRPr lang="en-US" sz="1500" dirty="0"/>
+            <a:off x="6537960" y="4361688"/>
+            <a:ext cx="4754880" cy="1005840"/>
+          </a:xfrm>
+          <a:prstGeom prst="rect">
+            <a:avLst/>
+          </a:prstGeom>
+          <a:noFill/>
+          <a:ln/>
+        </p:spPr>
+        <p:txBody>
+          <a:bodyPr wrap="square" lIns="0" tIns="0" rIns="0" bIns="0" rtlCol="0" anchor="t"/>
+          <a:lstStyle/>
+          <a:p>
+            <a:pPr indent="0" marL="0">
+              <a:lnSpc>
+                <a:spcPct val="120000"/>
+              </a:lnSpc>
+              <a:buNone/>
+            </a:pPr>
+            <a:r>
+              <a:rPr lang="en-US" sz="1300" dirty="0">
+                <a:solidFill>
+                  <a:srgbClr val="667085"/>
+                </a:solidFill>
+                <a:latin typeface="IBM Plex Sans" pitchFamily="34" charset="0"/>
+                <a:ea typeface="IBM Plex Sans" pitchFamily="34" charset="-122"/>
+                <a:cs typeface="IBM Plex Sans" pitchFamily="34" charset="-120"/>
+              </a:rPr>
+              <a:t>len(), int() and round() are functions somebody else wrote: you call them exactly the way you call your own.</a:t>
+            </a:r>
+            <a:endParaRPr lang="en-US" sz="1300" dirty="0"/>
           </a:p>
         </p:txBody>
       </p:sp>
@@ -4840,6 +4747,1046 @@
 <file path=ppt/slides/slide14.xml><?xml version="1.0" encoding="utf-8"?>
 <p:sld xmlns:a="http://schemas.openxmlformats.org/drawingml/2006/main" xmlns:r="http://schemas.openxmlformats.org/officeDocument/2006/relationships" xmlns:p="http://schemas.openxmlformats.org/presentationml/2006/main">
   <p:cSld name="Slide 14">
+    <p:bg>
+      <p:bgPr>
+        <a:solidFill>
+          <a:srgbClr val="F7F7F4"/>
+        </a:solidFill>
+      </p:bgPr>
+    </p:bg>
+    <p:spTree>
+      <p:nvGrpSpPr>
+        <p:cNvPr id="1" name=""/>
+        <p:cNvGrpSpPr/>
+        <p:nvPr/>
+      </p:nvGrpSpPr>
+      <p:grpSpPr>
+        <a:xfrm>
+          <a:off x="0" y="0"/>
+          <a:ext cx="0" cy="0"/>
+          <a:chOff x="0" y="0"/>
+          <a:chExt cx="0" cy="0"/>
+        </a:xfrm>
+      </p:grpSpPr>
+      <p:sp>
+        <p:nvSpPr>
+          <p:cNvPr id="2" name="Shape 0"/>
+          <p:cNvSpPr/>
+          <p:nvPr/>
+        </p:nvSpPr>
+        <p:spPr>
+          <a:xfrm>
+            <a:off x="0" y="0"/>
+            <a:ext cx="12188952" cy="82296"/>
+          </a:xfrm>
+          <a:prstGeom prst="rect">
+            <a:avLst/>
+          </a:prstGeom>
+          <a:solidFill>
+            <a:srgbClr val="2D63FF"/>
+          </a:solidFill>
+          <a:ln/>
+        </p:spPr>
+      </p:sp>
+      <p:sp>
+        <p:nvSpPr>
+          <p:cNvPr id="3" name="Text 1"/>
+          <p:cNvSpPr txBox="1"/>
+          <p:nvPr/>
+        </p:nvSpPr>
+        <p:spPr>
+          <a:xfrm>
+            <a:off x="502920" y="6236208"/>
+            <a:ext cx="7772400" cy="365760"/>
+          </a:xfrm>
+          <a:prstGeom prst="rect">
+            <a:avLst/>
+          </a:prstGeom>
+          <a:noFill/>
+          <a:ln/>
+        </p:spPr>
+        <p:txBody>
+          <a:bodyPr wrap="square" lIns="0" tIns="0" rIns="0" bIns="0" rtlCol="0" anchor="ctr"/>
+          <a:lstStyle/>
+          <a:p>
+            <a:pPr indent="0" marL="0">
+              <a:buNone/>
+            </a:pPr>
+            <a:r>
+              <a:rPr lang="en-US" sz="1100" dirty="0">
+                <a:solidFill>
+                  <a:srgbClr val="667085"/>
+                </a:solidFill>
+                <a:latin typeface="IBM Plex Mono" pitchFamily="34" charset="0"/>
+                <a:ea typeface="IBM Plex Mono" pitchFamily="34" charset="-122"/>
+                <a:cs typeface="IBM Plex Mono" pitchFamily="34" charset="-120"/>
+              </a:rPr>
+              <a:t>Python programming  |  Lesson 9</a:t>
+            </a:r>
+            <a:endParaRPr lang="en-US" sz="1100" dirty="0"/>
+          </a:p>
+        </p:txBody>
+      </p:sp>
+      <p:sp>
+        <p:nvSpPr>
+          <p:cNvPr id="4" name="Text 2"/>
+          <p:cNvSpPr txBox="1"/>
+          <p:nvPr/>
+        </p:nvSpPr>
+        <p:spPr>
+          <a:xfrm>
+            <a:off x="9326880" y="6236208"/>
+            <a:ext cx="2377440" cy="365760"/>
+          </a:xfrm>
+          <a:prstGeom prst="rect">
+            <a:avLst/>
+          </a:prstGeom>
+          <a:noFill/>
+          <a:ln/>
+        </p:spPr>
+        <p:txBody>
+          <a:bodyPr wrap="square" lIns="0" tIns="0" rIns="0" bIns="0" rtlCol="0" anchor="ctr"/>
+          <a:lstStyle/>
+          <a:p>
+            <a:pPr algn="r" indent="0" marL="0">
+              <a:buNone/>
+            </a:pPr>
+            <a:r>
+              <a:rPr lang="en-US" sz="1100" dirty="0">
+                <a:solidFill>
+                  <a:srgbClr val="667085"/>
+                </a:solidFill>
+                <a:latin typeface="IBM Plex Mono" pitchFamily="34" charset="0"/>
+                <a:ea typeface="IBM Plex Mono" pitchFamily="34" charset="-122"/>
+                <a:cs typeface="IBM Plex Mono" pitchFamily="34" charset="-120"/>
+              </a:rPr>
+              <a:t>Revise 360</a:t>
+            </a:r>
+            <a:endParaRPr lang="en-US" sz="1100" dirty="0"/>
+          </a:p>
+        </p:txBody>
+      </p:sp>
+      <p:sp>
+        <p:nvSpPr>
+          <p:cNvPr id="5" name="Text 3"/>
+          <p:cNvSpPr txBox="1"/>
+          <p:nvPr/>
+        </p:nvSpPr>
+        <p:spPr>
+          <a:xfrm>
+            <a:off x="502920" y="411480"/>
+            <a:ext cx="11155680" cy="777240"/>
+          </a:xfrm>
+          <a:prstGeom prst="rect">
+            <a:avLst/>
+          </a:prstGeom>
+          <a:noFill/>
+          <a:ln/>
+        </p:spPr>
+        <p:txBody>
+          <a:bodyPr wrap="square" lIns="0" tIns="0" rIns="0" bIns="0" rtlCol="0" anchor="ctr"/>
+          <a:lstStyle/>
+          <a:p>
+            <a:pPr indent="0" marL="0">
+              <a:buNone/>
+            </a:pPr>
+            <a:r>
+              <a:rPr lang="en-US" sz="3200" b="1" dirty="0">
+                <a:solidFill>
+                  <a:srgbClr val="101828"/>
+                </a:solidFill>
+                <a:latin typeface="IBM Plex Sans" pitchFamily="34" charset="0"/>
+                <a:ea typeface="IBM Plex Sans" pitchFamily="34" charset="-122"/>
+                <a:cs typeface="IBM Plex Sans" pitchFamily="34" charset="-120"/>
+              </a:rPr>
+              <a:t>Exam practice</a:t>
+            </a:r>
+            <a:endParaRPr lang="en-US" sz="3200" dirty="0"/>
+          </a:p>
+        </p:txBody>
+      </p:sp>
+      <p:sp>
+        <p:nvSpPr>
+          <p:cNvPr id="6" name="Text 4"/>
+          <p:cNvSpPr txBox="1"/>
+          <p:nvPr/>
+        </p:nvSpPr>
+        <p:spPr>
+          <a:xfrm>
+            <a:off x="502920" y="1170432"/>
+            <a:ext cx="11155680" cy="411480"/>
+          </a:xfrm>
+          <a:prstGeom prst="rect">
+            <a:avLst/>
+          </a:prstGeom>
+          <a:noFill/>
+          <a:ln/>
+        </p:spPr>
+        <p:txBody>
+          <a:bodyPr wrap="square" lIns="0" tIns="0" rIns="0" bIns="0" rtlCol="0" anchor="ctr"/>
+          <a:lstStyle/>
+          <a:p>
+            <a:pPr indent="0" marL="0">
+              <a:buNone/>
+            </a:pPr>
+            <a:r>
+              <a:rPr lang="en-US" sz="1500" dirty="0">
+                <a:solidFill>
+                  <a:srgbClr val="667085"/>
+                </a:solidFill>
+                <a:latin typeface="IBM Plex Sans" pitchFamily="34" charset="0"/>
+                <a:ea typeface="IBM Plex Sans" pitchFamily="34" charset="-122"/>
+                <a:cs typeface="IBM Plex Sans" pitchFamily="34" charset="-120"/>
+              </a:rPr>
+              <a:t>Devices away. Answer from memory on the worksheet.</a:t>
+            </a:r>
+            <a:endParaRPr lang="en-US" sz="1500" dirty="0"/>
+          </a:p>
+        </p:txBody>
+      </p:sp>
+      <p:sp>
+        <p:nvSpPr>
+          <p:cNvPr id="7" name="Shape 5"/>
+          <p:cNvSpPr/>
+          <p:nvPr/>
+        </p:nvSpPr>
+        <p:spPr>
+          <a:xfrm>
+            <a:off x="502920" y="1828800"/>
+            <a:ext cx="11155680" cy="1097280"/>
+          </a:xfrm>
+          <a:prstGeom prst="roundRect">
+            <a:avLst>
+              <a:gd name="adj" fmla="val 10000"/>
+            </a:avLst>
+          </a:prstGeom>
+          <a:solidFill>
+            <a:srgbClr val="FFFFFF"/>
+          </a:solidFill>
+          <a:ln w="15875">
+            <a:solidFill>
+              <a:srgbClr val="D9DEE7"/>
+            </a:solidFill>
+            <a:prstDash val="solid"/>
+          </a:ln>
+        </p:spPr>
+      </p:sp>
+      <p:sp>
+        <p:nvSpPr>
+          <p:cNvPr id="8" name="Text 6"/>
+          <p:cNvSpPr txBox="1"/>
+          <p:nvPr/>
+        </p:nvSpPr>
+        <p:spPr>
+          <a:xfrm>
+            <a:off x="914400" y="1938528"/>
+            <a:ext cx="9418320" cy="877824"/>
+          </a:xfrm>
+          <a:prstGeom prst="rect">
+            <a:avLst/>
+          </a:prstGeom>
+          <a:noFill/>
+          <a:ln/>
+        </p:spPr>
+        <p:txBody>
+          <a:bodyPr wrap="square" lIns="0" tIns="0" rIns="0" bIns="0" rtlCol="0" anchor="ctr"/>
+          <a:lstStyle/>
+          <a:p>
+            <a:pPr indent="0" marL="0">
+              <a:lnSpc>
+                <a:spcPct val="118000"/>
+              </a:lnSpc>
+              <a:buNone/>
+            </a:pPr>
+            <a:r>
+              <a:rPr lang="en-US" sz="1700" dirty="0">
+                <a:solidFill>
+                  <a:srgbClr val="101828"/>
+                </a:solidFill>
+                <a:latin typeface="IBM Plex Sans" pitchFamily="34" charset="0"/>
+                <a:ea typeface="IBM Plex Sans" pitchFamily="34" charset="-122"/>
+                <a:cs typeface="IBM Plex Sans" pitchFamily="34" charset="-120"/>
+              </a:rPr>
+              <a:t>A function called </a:t>
+            </a:r>
+            <a:pPr indent="0" marL="0">
+              <a:lnSpc>
+                <a:spcPct val="118000"/>
+              </a:lnSpc>
+              <a:buNone/>
+            </a:pPr>
+            <a:r>
+              <a:rPr lang="en-US" sz="1700" dirty="0">
+                <a:solidFill>
+                  <a:srgbClr val="18181B"/>
+                </a:solidFill>
+                <a:latin typeface="IBM Plex Mono" pitchFamily="34" charset="0"/>
+                <a:ea typeface="IBM Plex Mono" pitchFamily="34" charset="-122"/>
+                <a:cs typeface="IBM Plex Mono" pitchFamily="34" charset="-120"/>
+              </a:rPr>
+              <a:t>double</a:t>
+            </a:r>
+            <a:pPr indent="0" marL="0">
+              <a:lnSpc>
+                <a:spcPct val="118000"/>
+              </a:lnSpc>
+              <a:buNone/>
+            </a:pPr>
+            <a:r>
+              <a:rPr lang="en-US" sz="1700" dirty="0">
+                <a:solidFill>
+                  <a:srgbClr val="101828"/>
+                </a:solidFill>
+                <a:latin typeface="IBM Plex Sans" pitchFamily="34" charset="0"/>
+                <a:ea typeface="IBM Plex Sans" pitchFamily="34" charset="-122"/>
+                <a:cs typeface="IBM Plex Sans" pitchFamily="34" charset="-120"/>
+              </a:rPr>
+              <a:t> holds one line, </a:t>
+            </a:r>
+            <a:pPr indent="0" marL="0">
+              <a:lnSpc>
+                <a:spcPct val="118000"/>
+              </a:lnSpc>
+              <a:buNone/>
+            </a:pPr>
+            <a:r>
+              <a:rPr lang="en-US" sz="1700" dirty="0">
+                <a:solidFill>
+                  <a:srgbClr val="1D4ED8"/>
+                </a:solidFill>
+                <a:latin typeface="IBM Plex Mono" pitchFamily="34" charset="0"/>
+                <a:ea typeface="IBM Plex Mono" pitchFamily="34" charset="-122"/>
+                <a:cs typeface="IBM Plex Mono" pitchFamily="34" charset="-120"/>
+              </a:rPr>
+              <a:t>print</a:t>
+            </a:r>
+            <a:pPr indent="0" marL="0">
+              <a:lnSpc>
+                <a:spcPct val="118000"/>
+              </a:lnSpc>
+              <a:buNone/>
+            </a:pPr>
+            <a:r>
+              <a:rPr lang="en-US" sz="1700" dirty="0">
+                <a:solidFill>
+                  <a:srgbClr val="3F3F46"/>
+                </a:solidFill>
+                <a:latin typeface="IBM Plex Mono" pitchFamily="34" charset="0"/>
+                <a:ea typeface="IBM Plex Mono" pitchFamily="34" charset="-122"/>
+                <a:cs typeface="IBM Plex Mono" pitchFamily="34" charset="-120"/>
+              </a:rPr>
+              <a:t>(</a:t>
+            </a:r>
+            <a:pPr indent="0" marL="0">
+              <a:lnSpc>
+                <a:spcPct val="118000"/>
+              </a:lnSpc>
+              <a:buNone/>
+            </a:pPr>
+            <a:r>
+              <a:rPr lang="en-US" sz="1700" dirty="0">
+                <a:solidFill>
+                  <a:srgbClr val="18181B"/>
+                </a:solidFill>
+                <a:latin typeface="IBM Plex Mono" pitchFamily="34" charset="0"/>
+                <a:ea typeface="IBM Plex Mono" pitchFamily="34" charset="-122"/>
+                <a:cs typeface="IBM Plex Mono" pitchFamily="34" charset="-120"/>
+              </a:rPr>
+              <a:t>n</a:t>
+            </a:r>
+            <a:pPr indent="0" marL="0">
+              <a:lnSpc>
+                <a:spcPct val="118000"/>
+              </a:lnSpc>
+              <a:buNone/>
+            </a:pPr>
+            <a:r>
+              <a:rPr lang="en-US" sz="1700" dirty="0">
+                <a:solidFill>
+                  <a:srgbClr val="18181B"/>
+                </a:solidFill>
+                <a:latin typeface="IBM Plex Mono" pitchFamily="34" charset="0"/>
+                <a:ea typeface="IBM Plex Mono" pitchFamily="34" charset="-122"/>
+                <a:cs typeface="IBM Plex Mono" pitchFamily="34" charset="-120"/>
+              </a:rPr>
+              <a:t> </a:t>
+            </a:r>
+            <a:pPr indent="0" marL="0">
+              <a:lnSpc>
+                <a:spcPct val="118000"/>
+              </a:lnSpc>
+              <a:buNone/>
+            </a:pPr>
+            <a:r>
+              <a:rPr lang="en-US" sz="1700" dirty="0">
+                <a:solidFill>
+                  <a:srgbClr val="3F3F46"/>
+                </a:solidFill>
+                <a:latin typeface="IBM Plex Mono" pitchFamily="34" charset="0"/>
+                <a:ea typeface="IBM Plex Mono" pitchFamily="34" charset="-122"/>
+                <a:cs typeface="IBM Plex Mono" pitchFamily="34" charset="-120"/>
+              </a:rPr>
+              <a:t>*</a:t>
+            </a:r>
+            <a:pPr indent="0" marL="0">
+              <a:lnSpc>
+                <a:spcPct val="118000"/>
+              </a:lnSpc>
+              <a:buNone/>
+            </a:pPr>
+            <a:r>
+              <a:rPr lang="en-US" sz="1700" dirty="0">
+                <a:solidFill>
+                  <a:srgbClr val="18181B"/>
+                </a:solidFill>
+                <a:latin typeface="IBM Plex Mono" pitchFamily="34" charset="0"/>
+                <a:ea typeface="IBM Plex Mono" pitchFamily="34" charset="-122"/>
+                <a:cs typeface="IBM Plex Mono" pitchFamily="34" charset="-120"/>
+              </a:rPr>
+              <a:t> </a:t>
+            </a:r>
+            <a:pPr indent="0" marL="0">
+              <a:lnSpc>
+                <a:spcPct val="118000"/>
+              </a:lnSpc>
+              <a:buNone/>
+            </a:pPr>
+            <a:r>
+              <a:rPr lang="en-US" sz="1700" dirty="0">
+                <a:solidFill>
+                  <a:srgbClr val="9A3412"/>
+                </a:solidFill>
+                <a:latin typeface="IBM Plex Mono" pitchFamily="34" charset="0"/>
+                <a:ea typeface="IBM Plex Mono" pitchFamily="34" charset="-122"/>
+                <a:cs typeface="IBM Plex Mono" pitchFamily="34" charset="-120"/>
+              </a:rPr>
+              <a:t>2</a:t>
+            </a:r>
+            <a:pPr indent="0" marL="0">
+              <a:lnSpc>
+                <a:spcPct val="118000"/>
+              </a:lnSpc>
+              <a:buNone/>
+            </a:pPr>
+            <a:r>
+              <a:rPr lang="en-US" sz="1700" dirty="0">
+                <a:solidFill>
+                  <a:srgbClr val="3F3F46"/>
+                </a:solidFill>
+                <a:latin typeface="IBM Plex Mono" pitchFamily="34" charset="0"/>
+                <a:ea typeface="IBM Plex Mono" pitchFamily="34" charset="-122"/>
+                <a:cs typeface="IBM Plex Mono" pitchFamily="34" charset="-120"/>
+              </a:rPr>
+              <a:t>)</a:t>
+            </a:r>
+            <a:pPr indent="0" marL="0">
+              <a:lnSpc>
+                <a:spcPct val="118000"/>
+              </a:lnSpc>
+              <a:buNone/>
+            </a:pPr>
+            <a:r>
+              <a:rPr lang="en-US" sz="1700" dirty="0">
+                <a:solidFill>
+                  <a:srgbClr val="101828"/>
+                </a:solidFill>
+                <a:latin typeface="IBM Plex Sans" pitchFamily="34" charset="0"/>
+                <a:ea typeface="IBM Plex Sans" pitchFamily="34" charset="-122"/>
+                <a:cs typeface="IBM Plex Sans" pitchFamily="34" charset="-120"/>
+              </a:rPr>
+              <a:t>. The main program writes </a:t>
+            </a:r>
+            <a:pPr indent="0" marL="0">
+              <a:lnSpc>
+                <a:spcPct val="118000"/>
+              </a:lnSpc>
+              <a:buNone/>
+            </a:pPr>
+            <a:r>
+              <a:rPr lang="en-US" sz="1700" dirty="0">
+                <a:solidFill>
+                  <a:srgbClr val="18181B"/>
+                </a:solidFill>
+                <a:latin typeface="IBM Plex Mono" pitchFamily="34" charset="0"/>
+                <a:ea typeface="IBM Plex Mono" pitchFamily="34" charset="-122"/>
+                <a:cs typeface="IBM Plex Mono" pitchFamily="34" charset="-120"/>
+              </a:rPr>
+              <a:t>answer</a:t>
+            </a:r>
+            <a:pPr indent="0" marL="0">
+              <a:lnSpc>
+                <a:spcPct val="118000"/>
+              </a:lnSpc>
+              <a:buNone/>
+            </a:pPr>
+            <a:r>
+              <a:rPr lang="en-US" sz="1700" dirty="0">
+                <a:solidFill>
+                  <a:srgbClr val="18181B"/>
+                </a:solidFill>
+                <a:latin typeface="IBM Plex Mono" pitchFamily="34" charset="0"/>
+                <a:ea typeface="IBM Plex Mono" pitchFamily="34" charset="-122"/>
+                <a:cs typeface="IBM Plex Mono" pitchFamily="34" charset="-120"/>
+              </a:rPr>
+              <a:t> </a:t>
+            </a:r>
+            <a:pPr indent="0" marL="0">
+              <a:lnSpc>
+                <a:spcPct val="118000"/>
+              </a:lnSpc>
+              <a:buNone/>
+            </a:pPr>
+            <a:r>
+              <a:rPr lang="en-US" sz="1700" dirty="0">
+                <a:solidFill>
+                  <a:srgbClr val="3F3F46"/>
+                </a:solidFill>
+                <a:latin typeface="IBM Plex Mono" pitchFamily="34" charset="0"/>
+                <a:ea typeface="IBM Plex Mono" pitchFamily="34" charset="-122"/>
+                <a:cs typeface="IBM Plex Mono" pitchFamily="34" charset="-120"/>
+              </a:rPr>
+              <a:t>=</a:t>
+            </a:r>
+            <a:pPr indent="0" marL="0">
+              <a:lnSpc>
+                <a:spcPct val="118000"/>
+              </a:lnSpc>
+              <a:buNone/>
+            </a:pPr>
+            <a:r>
+              <a:rPr lang="en-US" sz="1700" dirty="0">
+                <a:solidFill>
+                  <a:srgbClr val="18181B"/>
+                </a:solidFill>
+                <a:latin typeface="IBM Plex Mono" pitchFamily="34" charset="0"/>
+                <a:ea typeface="IBM Plex Mono" pitchFamily="34" charset="-122"/>
+                <a:cs typeface="IBM Plex Mono" pitchFamily="34" charset="-120"/>
+              </a:rPr>
+              <a:t> </a:t>
+            </a:r>
+            <a:pPr indent="0" marL="0">
+              <a:lnSpc>
+                <a:spcPct val="118000"/>
+              </a:lnSpc>
+              <a:buNone/>
+            </a:pPr>
+            <a:r>
+              <a:rPr lang="en-US" sz="1700" dirty="0">
+                <a:solidFill>
+                  <a:srgbClr val="18181B"/>
+                </a:solidFill>
+                <a:latin typeface="IBM Plex Mono" pitchFamily="34" charset="0"/>
+                <a:ea typeface="IBM Plex Mono" pitchFamily="34" charset="-122"/>
+                <a:cs typeface="IBM Plex Mono" pitchFamily="34" charset="-120"/>
+              </a:rPr>
+              <a:t>double</a:t>
+            </a:r>
+            <a:pPr indent="0" marL="0">
+              <a:lnSpc>
+                <a:spcPct val="118000"/>
+              </a:lnSpc>
+              <a:buNone/>
+            </a:pPr>
+            <a:r>
+              <a:rPr lang="en-US" sz="1700" dirty="0">
+                <a:solidFill>
+                  <a:srgbClr val="3F3F46"/>
+                </a:solidFill>
+                <a:latin typeface="IBM Plex Mono" pitchFamily="34" charset="0"/>
+                <a:ea typeface="IBM Plex Mono" pitchFamily="34" charset="-122"/>
+                <a:cs typeface="IBM Plex Mono" pitchFamily="34" charset="-120"/>
+              </a:rPr>
+              <a:t>(</a:t>
+            </a:r>
+            <a:pPr indent="0" marL="0">
+              <a:lnSpc>
+                <a:spcPct val="118000"/>
+              </a:lnSpc>
+              <a:buNone/>
+            </a:pPr>
+            <a:r>
+              <a:rPr lang="en-US" sz="1700" dirty="0">
+                <a:solidFill>
+                  <a:srgbClr val="9A3412"/>
+                </a:solidFill>
+                <a:latin typeface="IBM Plex Mono" pitchFamily="34" charset="0"/>
+                <a:ea typeface="IBM Plex Mono" pitchFamily="34" charset="-122"/>
+                <a:cs typeface="IBM Plex Mono" pitchFamily="34" charset="-120"/>
+              </a:rPr>
+              <a:t>7</a:t>
+            </a:r>
+            <a:pPr indent="0" marL="0">
+              <a:lnSpc>
+                <a:spcPct val="118000"/>
+              </a:lnSpc>
+              <a:buNone/>
+            </a:pPr>
+            <a:r>
+              <a:rPr lang="en-US" sz="1700" dirty="0">
+                <a:solidFill>
+                  <a:srgbClr val="3F3F46"/>
+                </a:solidFill>
+                <a:latin typeface="IBM Plex Mono" pitchFamily="34" charset="0"/>
+                <a:ea typeface="IBM Plex Mono" pitchFamily="34" charset="-122"/>
+                <a:cs typeface="IBM Plex Mono" pitchFamily="34" charset="-120"/>
+              </a:rPr>
+              <a:t>)</a:t>
+            </a:r>
+            <a:pPr indent="0" marL="0">
+              <a:lnSpc>
+                <a:spcPct val="118000"/>
+              </a:lnSpc>
+              <a:buNone/>
+            </a:pPr>
+            <a:r>
+              <a:rPr lang="en-US" sz="1700" dirty="0">
+                <a:solidFill>
+                  <a:srgbClr val="101828"/>
+                </a:solidFill>
+                <a:latin typeface="IBM Plex Sans" pitchFamily="34" charset="0"/>
+                <a:ea typeface="IBM Plex Sans" pitchFamily="34" charset="-122"/>
+                <a:cs typeface="IBM Plex Sans" pitchFamily="34" charset="-120"/>
+              </a:rPr>
+              <a:t> and then prints </a:t>
+            </a:r>
+            <a:pPr indent="0" marL="0">
+              <a:lnSpc>
+                <a:spcPct val="118000"/>
+              </a:lnSpc>
+              <a:buNone/>
+            </a:pPr>
+            <a:r>
+              <a:rPr lang="en-US" sz="1700" dirty="0">
+                <a:solidFill>
+                  <a:srgbClr val="18181B"/>
+                </a:solidFill>
+                <a:latin typeface="IBM Plex Mono" pitchFamily="34" charset="0"/>
+                <a:ea typeface="IBM Plex Mono" pitchFamily="34" charset="-122"/>
+                <a:cs typeface="IBM Plex Mono" pitchFamily="34" charset="-120"/>
+              </a:rPr>
+              <a:t>answer</a:t>
+            </a:r>
+            <a:pPr indent="0" marL="0">
+              <a:lnSpc>
+                <a:spcPct val="118000"/>
+              </a:lnSpc>
+              <a:buNone/>
+            </a:pPr>
+            <a:r>
+              <a:rPr lang="en-US" sz="1700" dirty="0">
+                <a:solidFill>
+                  <a:srgbClr val="101828"/>
+                </a:solidFill>
+                <a:latin typeface="IBM Plex Sans" pitchFamily="34" charset="0"/>
+                <a:ea typeface="IBM Plex Sans" pitchFamily="34" charset="-122"/>
+                <a:cs typeface="IBM Plex Sans" pitchFamily="34" charset="-120"/>
+              </a:rPr>
+              <a:t>, which shows </a:t>
+            </a:r>
+            <a:pPr indent="0" marL="0">
+              <a:lnSpc>
+                <a:spcPct val="118000"/>
+              </a:lnSpc>
+              <a:buNone/>
+            </a:pPr>
+            <a:r>
+              <a:rPr lang="en-US" sz="1700" dirty="0">
+                <a:solidFill>
+                  <a:srgbClr val="6B21A8"/>
+                </a:solidFill>
+                <a:latin typeface="IBM Plex Mono" pitchFamily="34" charset="0"/>
+                <a:ea typeface="IBM Plex Mono" pitchFamily="34" charset="-122"/>
+                <a:cs typeface="IBM Plex Mono" pitchFamily="34" charset="-120"/>
+              </a:rPr>
+              <a:t>None</a:t>
+            </a:r>
+            <a:pPr indent="0" marL="0">
+              <a:lnSpc>
+                <a:spcPct val="118000"/>
+              </a:lnSpc>
+              <a:buNone/>
+            </a:pPr>
+            <a:r>
+              <a:rPr lang="en-US" sz="1700" dirty="0">
+                <a:solidFill>
+                  <a:srgbClr val="101828"/>
+                </a:solidFill>
+                <a:latin typeface="IBM Plex Sans" pitchFamily="34" charset="0"/>
+                <a:ea typeface="IBM Plex Sans" pitchFamily="34" charset="-122"/>
+                <a:cs typeface="IBM Plex Sans" pitchFamily="34" charset="-120"/>
+              </a:rPr>
+              <a:t>. Explain why </a:t>
+            </a:r>
+            <a:pPr indent="0" marL="0">
+              <a:lnSpc>
+                <a:spcPct val="118000"/>
+              </a:lnSpc>
+              <a:buNone/>
+            </a:pPr>
+            <a:r>
+              <a:rPr lang="en-US" sz="1700" dirty="0">
+                <a:solidFill>
+                  <a:srgbClr val="6B21A8"/>
+                </a:solidFill>
+                <a:latin typeface="IBM Plex Mono" pitchFamily="34" charset="0"/>
+                <a:ea typeface="IBM Plex Mono" pitchFamily="34" charset="-122"/>
+                <a:cs typeface="IBM Plex Mono" pitchFamily="34" charset="-120"/>
+              </a:rPr>
+              <a:t>None</a:t>
+            </a:r>
+            <a:pPr indent="0" marL="0">
+              <a:lnSpc>
+                <a:spcPct val="118000"/>
+              </a:lnSpc>
+              <a:buNone/>
+            </a:pPr>
+            <a:r>
+              <a:rPr lang="en-US" sz="1700" dirty="0">
+                <a:solidFill>
+                  <a:srgbClr val="101828"/>
+                </a:solidFill>
+                <a:latin typeface="IBM Plex Sans" pitchFamily="34" charset="0"/>
+                <a:ea typeface="IBM Plex Sans" pitchFamily="34" charset="-122"/>
+                <a:cs typeface="IBM Plex Sans" pitchFamily="34" charset="-120"/>
+              </a:rPr>
+              <a:t> is printed, and write the line inside double corrected.</a:t>
+            </a:r>
+            <a:endParaRPr lang="en-US" sz="1700" dirty="0"/>
+          </a:p>
+        </p:txBody>
+      </p:sp>
+      <p:sp>
+        <p:nvSpPr>
+          <p:cNvPr id="9" name="Shape 7"/>
+          <p:cNvSpPr/>
+          <p:nvPr/>
+        </p:nvSpPr>
+        <p:spPr>
+          <a:xfrm>
+            <a:off x="10515600" y="2130552"/>
+            <a:ext cx="868680" cy="493776"/>
+          </a:xfrm>
+          <a:prstGeom prst="roundRect">
+            <a:avLst>
+              <a:gd name="adj" fmla="val 18519"/>
+            </a:avLst>
+          </a:prstGeom>
+          <a:solidFill>
+            <a:srgbClr val="EEF2FB"/>
+          </a:solidFill>
+          <a:ln/>
+        </p:spPr>
+      </p:sp>
+      <p:sp>
+        <p:nvSpPr>
+          <p:cNvPr id="10" name="Text 8"/>
+          <p:cNvSpPr txBox="1"/>
+          <p:nvPr/>
+        </p:nvSpPr>
+        <p:spPr>
+          <a:xfrm>
+            <a:off x="10515600" y="2130552"/>
+            <a:ext cx="868680" cy="493776"/>
+          </a:xfrm>
+          <a:prstGeom prst="rect">
+            <a:avLst/>
+          </a:prstGeom>
+          <a:noFill/>
+          <a:ln/>
+        </p:spPr>
+        <p:txBody>
+          <a:bodyPr wrap="square" lIns="0" tIns="0" rIns="0" bIns="0" rtlCol="0" anchor="ctr"/>
+          <a:lstStyle/>
+          <a:p>
+            <a:pPr algn="ctr" indent="0" marL="0">
+              <a:buNone/>
+            </a:pPr>
+            <a:r>
+              <a:rPr lang="en-US" sz="1500" b="1" dirty="0">
+                <a:solidFill>
+                  <a:srgbClr val="2D63FF"/>
+                </a:solidFill>
+                <a:latin typeface="IBM Plex Mono" pitchFamily="34" charset="0"/>
+                <a:ea typeface="IBM Plex Mono" pitchFamily="34" charset="-122"/>
+                <a:cs typeface="IBM Plex Mono" pitchFamily="34" charset="-120"/>
+              </a:rPr>
+              <a:t>[3]</a:t>
+            </a:r>
+            <a:endParaRPr lang="en-US" sz="1500" dirty="0"/>
+          </a:p>
+        </p:txBody>
+      </p:sp>
+      <p:sp>
+        <p:nvSpPr>
+          <p:cNvPr id="11" name="Shape 9"/>
+          <p:cNvSpPr/>
+          <p:nvPr/>
+        </p:nvSpPr>
+        <p:spPr>
+          <a:xfrm>
+            <a:off x="502920" y="3127248"/>
+            <a:ext cx="11155680" cy="1097280"/>
+          </a:xfrm>
+          <a:prstGeom prst="roundRect">
+            <a:avLst>
+              <a:gd name="adj" fmla="val 10000"/>
+            </a:avLst>
+          </a:prstGeom>
+          <a:solidFill>
+            <a:srgbClr val="FFFFFF"/>
+          </a:solidFill>
+          <a:ln w="15875">
+            <a:solidFill>
+              <a:srgbClr val="D9DEE7"/>
+            </a:solidFill>
+            <a:prstDash val="solid"/>
+          </a:ln>
+        </p:spPr>
+      </p:sp>
+      <p:sp>
+        <p:nvSpPr>
+          <p:cNvPr id="12" name="Text 10"/>
+          <p:cNvSpPr txBox="1"/>
+          <p:nvPr/>
+        </p:nvSpPr>
+        <p:spPr>
+          <a:xfrm>
+            <a:off x="914400" y="3236976"/>
+            <a:ext cx="9418320" cy="877824"/>
+          </a:xfrm>
+          <a:prstGeom prst="rect">
+            <a:avLst/>
+          </a:prstGeom>
+          <a:noFill/>
+          <a:ln/>
+        </p:spPr>
+        <p:txBody>
+          <a:bodyPr wrap="square" lIns="0" tIns="0" rIns="0" bIns="0" rtlCol="0" anchor="ctr"/>
+          <a:lstStyle/>
+          <a:p>
+            <a:pPr indent="0" marL="0">
+              <a:lnSpc>
+                <a:spcPct val="118000"/>
+              </a:lnSpc>
+              <a:buNone/>
+            </a:pPr>
+            <a:r>
+              <a:rPr lang="en-US" sz="1700" dirty="0">
+                <a:solidFill>
+                  <a:srgbClr val="101828"/>
+                </a:solidFill>
+                <a:latin typeface="IBM Plex Sans" pitchFamily="34" charset="0"/>
+                <a:ea typeface="IBM Plex Sans" pitchFamily="34" charset="-122"/>
+                <a:cs typeface="IBM Plex Sans" pitchFamily="34" charset="-120"/>
+              </a:rPr>
+              <a:t>Write a function that takes two whole numbers and returns the larger of them, and a main program that reads two numbers and prints the value the function hands back.</a:t>
+            </a:r>
+            <a:endParaRPr lang="en-US" sz="1700" dirty="0"/>
+          </a:p>
+        </p:txBody>
+      </p:sp>
+      <p:sp>
+        <p:nvSpPr>
+          <p:cNvPr id="13" name="Shape 11"/>
+          <p:cNvSpPr/>
+          <p:nvPr/>
+        </p:nvSpPr>
+        <p:spPr>
+          <a:xfrm>
+            <a:off x="10515600" y="3429000"/>
+            <a:ext cx="868680" cy="493776"/>
+          </a:xfrm>
+          <a:prstGeom prst="roundRect">
+            <a:avLst>
+              <a:gd name="adj" fmla="val 18519"/>
+            </a:avLst>
+          </a:prstGeom>
+          <a:solidFill>
+            <a:srgbClr val="EEF2FB"/>
+          </a:solidFill>
+          <a:ln/>
+        </p:spPr>
+      </p:sp>
+      <p:sp>
+        <p:nvSpPr>
+          <p:cNvPr id="14" name="Text 12"/>
+          <p:cNvSpPr txBox="1"/>
+          <p:nvPr/>
+        </p:nvSpPr>
+        <p:spPr>
+          <a:xfrm>
+            <a:off x="10515600" y="3429000"/>
+            <a:ext cx="868680" cy="493776"/>
+          </a:xfrm>
+          <a:prstGeom prst="rect">
+            <a:avLst/>
+          </a:prstGeom>
+          <a:noFill/>
+          <a:ln/>
+        </p:spPr>
+        <p:txBody>
+          <a:bodyPr wrap="square" lIns="0" tIns="0" rIns="0" bIns="0" rtlCol="0" anchor="ctr"/>
+          <a:lstStyle/>
+          <a:p>
+            <a:pPr algn="ctr" indent="0" marL="0">
+              <a:buNone/>
+            </a:pPr>
+            <a:r>
+              <a:rPr lang="en-US" sz="1500" b="1" dirty="0">
+                <a:solidFill>
+                  <a:srgbClr val="2D63FF"/>
+                </a:solidFill>
+                <a:latin typeface="IBM Plex Mono" pitchFamily="34" charset="0"/>
+                <a:ea typeface="IBM Plex Mono" pitchFamily="34" charset="-122"/>
+                <a:cs typeface="IBM Plex Mono" pitchFamily="34" charset="-120"/>
+              </a:rPr>
+              <a:t>[5]</a:t>
+            </a:r>
+            <a:endParaRPr lang="en-US" sz="1500" dirty="0"/>
+          </a:p>
+        </p:txBody>
+      </p:sp>
+      <p:sp>
+        <p:nvSpPr>
+          <p:cNvPr id="15" name="Shape 13"/>
+          <p:cNvSpPr/>
+          <p:nvPr/>
+        </p:nvSpPr>
+        <p:spPr>
+          <a:xfrm>
+            <a:off x="502920" y="4425696"/>
+            <a:ext cx="11155680" cy="1097280"/>
+          </a:xfrm>
+          <a:prstGeom prst="roundRect">
+            <a:avLst>
+              <a:gd name="adj" fmla="val 10000"/>
+            </a:avLst>
+          </a:prstGeom>
+          <a:solidFill>
+            <a:srgbClr val="FFFFFF"/>
+          </a:solidFill>
+          <a:ln w="15875">
+            <a:solidFill>
+              <a:srgbClr val="D9DEE7"/>
+            </a:solidFill>
+            <a:prstDash val="solid"/>
+          </a:ln>
+        </p:spPr>
+      </p:sp>
+      <p:sp>
+        <p:nvSpPr>
+          <p:cNvPr id="16" name="Text 14"/>
+          <p:cNvSpPr txBox="1"/>
+          <p:nvPr/>
+        </p:nvSpPr>
+        <p:spPr>
+          <a:xfrm>
+            <a:off x="914400" y="4535424"/>
+            <a:ext cx="9418320" cy="877824"/>
+          </a:xfrm>
+          <a:prstGeom prst="rect">
+            <a:avLst/>
+          </a:prstGeom>
+          <a:noFill/>
+          <a:ln/>
+        </p:spPr>
+        <p:txBody>
+          <a:bodyPr wrap="square" lIns="0" tIns="0" rIns="0" bIns="0" rtlCol="0" anchor="ctr"/>
+          <a:lstStyle/>
+          <a:p>
+            <a:pPr indent="0" marL="0">
+              <a:lnSpc>
+                <a:spcPct val="118000"/>
+              </a:lnSpc>
+              <a:buNone/>
+            </a:pPr>
+            <a:r>
+              <a:rPr lang="en-US" sz="1700" dirty="0">
+                <a:solidFill>
+                  <a:srgbClr val="101828"/>
+                </a:solidFill>
+                <a:latin typeface="IBM Plex Sans" pitchFamily="34" charset="0"/>
+                <a:ea typeface="IBM Plex Sans" pitchFamily="34" charset="-122"/>
+                <a:cs typeface="IBM Plex Sans" pitchFamily="34" charset="-120"/>
+              </a:rPr>
+              <a:t>Write a procedure that takes a word and a whole number and prints them on one line with a single space between them, then call it for three different pairs of values.</a:t>
+            </a:r>
+            <a:endParaRPr lang="en-US" sz="1700" dirty="0"/>
+          </a:p>
+        </p:txBody>
+      </p:sp>
+      <p:sp>
+        <p:nvSpPr>
+          <p:cNvPr id="17" name="Shape 15"/>
+          <p:cNvSpPr/>
+          <p:nvPr/>
+        </p:nvSpPr>
+        <p:spPr>
+          <a:xfrm>
+            <a:off x="10515600" y="4727448"/>
+            <a:ext cx="868680" cy="493776"/>
+          </a:xfrm>
+          <a:prstGeom prst="roundRect">
+            <a:avLst>
+              <a:gd name="adj" fmla="val 18519"/>
+            </a:avLst>
+          </a:prstGeom>
+          <a:solidFill>
+            <a:srgbClr val="EEF2FB"/>
+          </a:solidFill>
+          <a:ln/>
+        </p:spPr>
+      </p:sp>
+      <p:sp>
+        <p:nvSpPr>
+          <p:cNvPr id="18" name="Text 16"/>
+          <p:cNvSpPr txBox="1"/>
+          <p:nvPr/>
+        </p:nvSpPr>
+        <p:spPr>
+          <a:xfrm>
+            <a:off x="10515600" y="4727448"/>
+            <a:ext cx="868680" cy="493776"/>
+          </a:xfrm>
+          <a:prstGeom prst="rect">
+            <a:avLst/>
+          </a:prstGeom>
+          <a:noFill/>
+          <a:ln/>
+        </p:spPr>
+        <p:txBody>
+          <a:bodyPr wrap="square" lIns="0" tIns="0" rIns="0" bIns="0" rtlCol="0" anchor="ctr"/>
+          <a:lstStyle/>
+          <a:p>
+            <a:pPr algn="ctr" indent="0" marL="0">
+              <a:buNone/>
+            </a:pPr>
+            <a:r>
+              <a:rPr lang="en-US" sz="1500" b="1" dirty="0">
+                <a:solidFill>
+                  <a:srgbClr val="2D63FF"/>
+                </a:solidFill>
+                <a:latin typeface="IBM Plex Mono" pitchFamily="34" charset="0"/>
+                <a:ea typeface="IBM Plex Mono" pitchFamily="34" charset="-122"/>
+                <a:cs typeface="IBM Plex Mono" pitchFamily="34" charset="-120"/>
+              </a:rPr>
+              <a:t>[4]</a:t>
+            </a:r>
+            <a:endParaRPr lang="en-US" sz="1500" dirty="0"/>
+          </a:p>
+        </p:txBody>
+      </p:sp>
+    </p:spTree>
+  </p:cSld>
+  <p:clrMapOvr>
+    <a:masterClrMapping/>
+  </p:clrMapOvr>
+</p:sld>
+</file>
+
+<file path=ppt/slides/slide15.xml><?xml version="1.0" encoding="utf-8"?>
+<p:sld xmlns:a="http://schemas.openxmlformats.org/drawingml/2006/main" xmlns:r="http://schemas.openxmlformats.org/officeDocument/2006/relationships" xmlns:p="http://schemas.openxmlformats.org/presentationml/2006/main">
+  <p:cSld name="Slide 15">
     <p:bg>
       <p:bgPr>
         <a:solidFill>
